--- a/Presentation.pptx
+++ b/Presentation.pptx
@@ -147,12 +147,20 @@
 </p:presentation>
 </file>
 
+<file path=ppt/revisionInfo.xml><?xml version="1.0" encoding="utf-8"?>
+<p1510:revInfo xmlns:a="http://schemas.openxmlformats.org/drawingml/2006/main" xmlns:r="http://schemas.openxmlformats.org/officeDocument/2006/relationships" xmlns:p1510="http://schemas.microsoft.com/office/powerpoint/2015/10/main">
+  <p1510:revLst>
+    <p1510:client id="{55725B31-4962-41AA-844B-8672FCF03F15}" v="1" dt="2026-06-09T07:57:26.671"/>
+  </p1510:revLst>
+</p1510:revInfo>
+</file>
+
 <file path=ppt/changesInfos/changesInfo1.xml><?xml version="1.0" encoding="utf-8"?>
 <pc:chgInfo xmlns:a="http://schemas.openxmlformats.org/drawingml/2006/main" xmlns:r="http://schemas.openxmlformats.org/officeDocument/2006/relationships" xmlns:ac="http://schemas.microsoft.com/office/drawing/2013/main/command" xmlns:pc="http://schemas.microsoft.com/office/powerpoint/2013/main/command">
   <pc:docChgLst>
     <pc:chgData name="Christina Knes" userId="7e9737a164333dbd" providerId="LiveId" clId="{72053980-4108-4AED-A5B7-3290F7F82C69}"/>
     <pc:docChg chg="custSel modSld">
-      <pc:chgData name="Christina Knes" userId="7e9737a164333dbd" providerId="LiveId" clId="{72053980-4108-4AED-A5B7-3290F7F82C69}" dt="2026-06-09T07:47:57.032" v="17" actId="14100"/>
+      <pc:chgData name="Christina Knes" userId="7e9737a164333dbd" providerId="LiveId" clId="{72053980-4108-4AED-A5B7-3290F7F82C69}" dt="2026-06-09T07:59:16.993" v="176" actId="20577"/>
       <pc:docMkLst>
         <pc:docMk/>
       </pc:docMkLst>
@@ -171,12 +179,20 @@
           </ac:grpSpMkLst>
         </pc:grpChg>
       </pc:sldChg>
-      <pc:sldChg chg="delSp mod">
-        <pc:chgData name="Christina Knes" userId="7e9737a164333dbd" providerId="LiveId" clId="{72053980-4108-4AED-A5B7-3290F7F82C69}" dt="2026-06-09T07:47:15.041" v="3" actId="478"/>
+      <pc:sldChg chg="addSp delSp modSp mod">
+        <pc:chgData name="Christina Knes" userId="7e9737a164333dbd" providerId="LiveId" clId="{72053980-4108-4AED-A5B7-3290F7F82C69}" dt="2026-06-09T07:59:16.993" v="176" actId="20577"/>
         <pc:sldMkLst>
           <pc:docMk/>
           <pc:sldMk cId="0" sldId="257"/>
         </pc:sldMkLst>
+        <pc:spChg chg="add mod">
+          <ac:chgData name="Christina Knes" userId="7e9737a164333dbd" providerId="LiveId" clId="{72053980-4108-4AED-A5B7-3290F7F82C69}" dt="2026-06-09T07:59:16.993" v="176" actId="20577"/>
+          <ac:spMkLst>
+            <pc:docMk/>
+            <pc:sldMk cId="0" sldId="257"/>
+            <ac:spMk id="3" creationId="{8DCB6488-6E08-1E6C-43C7-BBE1D91E7DEC}"/>
+          </ac:spMkLst>
+        </pc:spChg>
         <pc:grpChg chg="del">
           <ac:chgData name="Christina Knes" userId="7e9737a164333dbd" providerId="LiveId" clId="{72053980-4108-4AED-A5B7-3290F7F82C69}" dt="2026-06-09T07:47:15.041" v="3" actId="478"/>
           <ac:grpSpMkLst>
@@ -4337,6 +4353,111 @@
           </a:p>
         </p:txBody>
       </p:sp>
+      <p:sp>
+        <p:nvSpPr>
+          <p:cNvPr id="3" name="Textfeld 2">
+            <a:extLst>
+              <a:ext uri="{FF2B5EF4-FFF2-40B4-BE49-F238E27FC236}">
+                <a16:creationId xmlns:a16="http://schemas.microsoft.com/office/drawing/2014/main" id="{8DCB6488-6E08-1E6C-43C7-BBE1D91E7DEC}"/>
+              </a:ext>
+            </a:extLst>
+          </p:cNvPr>
+          <p:cNvSpPr txBox="1"/>
+          <p:nvPr/>
+        </p:nvSpPr>
+        <p:spPr>
+          <a:xfrm>
+            <a:off x="10591800" y="723900"/>
+            <a:ext cx="7050957" cy="1200329"/>
+          </a:xfrm>
+          <a:prstGeom prst="rect">
+            <a:avLst/>
+          </a:prstGeom>
+          <a:noFill/>
+        </p:spPr>
+        <p:txBody>
+          <a:bodyPr wrap="square" rtlCol="0">
+            <a:spAutoFit/>
+          </a:bodyPr>
+          <a:lstStyle/>
+          <a:p>
+            <a:r>
+              <a:rPr lang="de-AT" dirty="0"/>
+              <a:t>Review </a:t>
+            </a:r>
+            <a:r>
+              <a:rPr lang="de-AT" dirty="0" err="1"/>
+              <a:t>of</a:t>
+            </a:r>
+            <a:r>
+              <a:rPr lang="de-AT" dirty="0"/>
+              <a:t> </a:t>
+            </a:r>
+            <a:r>
+              <a:rPr lang="de-AT" dirty="0" err="1"/>
+              <a:t>the</a:t>
+            </a:r>
+            <a:r>
+              <a:rPr lang="de-AT" dirty="0"/>
+              <a:t> Study: Marina</a:t>
+            </a:r>
+          </a:p>
+          <a:p>
+            <a:r>
+              <a:rPr lang="de-AT" dirty="0"/>
+              <a:t>Main </a:t>
+            </a:r>
+            <a:r>
+              <a:rPr lang="de-AT" dirty="0" err="1"/>
+              <a:t>Results</a:t>
+            </a:r>
+            <a:r>
+              <a:rPr lang="de-AT" dirty="0"/>
+              <a:t>: Marina</a:t>
+            </a:r>
+          </a:p>
+          <a:p>
+            <a:r>
+              <a:rPr lang="de-AT" dirty="0"/>
+              <a:t>Quality and Prisma </a:t>
+            </a:r>
+            <a:r>
+              <a:rPr lang="de-AT" dirty="0" err="1"/>
+              <a:t>What</a:t>
+            </a:r>
+            <a:r>
+              <a:rPr lang="de-AT" dirty="0"/>
+              <a:t> </a:t>
+            </a:r>
+            <a:r>
+              <a:rPr lang="de-AT" dirty="0" err="1"/>
+              <a:t>is</a:t>
+            </a:r>
+            <a:r>
+              <a:rPr lang="de-AT" dirty="0"/>
+              <a:t> </a:t>
+            </a:r>
+            <a:r>
+              <a:rPr lang="de-AT" dirty="0" err="1"/>
+              <a:t>concluded</a:t>
+            </a:r>
+            <a:r>
+              <a:rPr lang="de-AT" dirty="0"/>
+              <a:t>: Christina</a:t>
+            </a:r>
+          </a:p>
+          <a:p>
+            <a:r>
+              <a:rPr lang="de-AT" dirty="0" err="1"/>
+              <a:t>Conclusion</a:t>
+            </a:r>
+            <a:r>
+              <a:rPr lang="de-AT" dirty="0"/>
+              <a:t> and Stakeholders: Maria Clara</a:t>
+            </a:r>
+          </a:p>
+        </p:txBody>
+      </p:sp>
     </p:spTree>
   </p:cSld>
   <p:clrMapOvr>

--- a/Presentation.pptx
+++ b/Presentation.pptx
@@ -5,18 +5,18 @@
     <p:sldMasterId id="2147483648" r:id="rId1"/>
   </p:sldMasterIdLst>
   <p:sldIdLst>
-    <p:sldId id="256" r:id="rId2"/>
-    <p:sldId id="257" r:id="rId3"/>
-    <p:sldId id="258" r:id="rId4"/>
-    <p:sldId id="259" r:id="rId5"/>
-    <p:sldId id="260" r:id="rId6"/>
-    <p:sldId id="261" r:id="rId7"/>
-    <p:sldId id="262" r:id="rId8"/>
-    <p:sldId id="263" r:id="rId9"/>
-    <p:sldId id="264" r:id="rId10"/>
-    <p:sldId id="265" r:id="rId11"/>
-    <p:sldId id="266" r:id="rId12"/>
-    <p:sldId id="267" r:id="rId13"/>
+    <p:sldId id="267" r:id="rId2"/>
+    <p:sldId id="271" r:id="rId3"/>
+    <p:sldId id="257" r:id="rId4"/>
+    <p:sldId id="258" r:id="rId5"/>
+    <p:sldId id="259" r:id="rId6"/>
+    <p:sldId id="260" r:id="rId7"/>
+    <p:sldId id="261" r:id="rId8"/>
+    <p:sldId id="262" r:id="rId9"/>
+    <p:sldId id="263" r:id="rId10"/>
+    <p:sldId id="264" r:id="rId11"/>
+    <p:sldId id="265" r:id="rId12"/>
+    <p:sldId id="266" r:id="rId13"/>
     <p:sldId id="268" r:id="rId14"/>
     <p:sldId id="269" r:id="rId15"/>
     <p:sldId id="270" r:id="rId16"/>
@@ -29,8 +29,15 @@
       <p:regular r:id="rId17"/>
     </p:embeddedFont>
     <p:embeddedFont>
+      <p:font typeface="IrisUPC" panose="020B0604020202020204" pitchFamily="34" charset="-34"/>
+      <p:regular r:id="rId18"/>
+      <p:bold r:id="rId19"/>
+      <p:italic r:id="rId20"/>
+      <p:boldItalic r:id="rId21"/>
+    </p:embeddedFont>
+    <p:embeddedFont>
       <p:font typeface="KG Primary Penmanship" panose="020B0604020202020204" charset="0"/>
-      <p:regular r:id="rId18"/>
+      <p:regular r:id="rId22"/>
     </p:embeddedFont>
   </p:embeddedFontLst>
   <p:defaultTextStyle>
@@ -129,6 +136,33 @@
     </a:lvl9pPr>
   </p:defaultTextStyle>
   <p:extLst>
+    <p:ext uri="{521415D9-36F7-43E2-AB2F-B90AF26B5E84}">
+      <p14:sectionLst xmlns:p14="http://schemas.microsoft.com/office/powerpoint/2010/main">
+        <p14:section name="Presentation" id="{949B3650-02F7-4E04-9F25-F1A55820F397}">
+          <p14:sldIdLst>
+            <p14:sldId id="267"/>
+            <p14:sldId id="271"/>
+          </p14:sldIdLst>
+        </p14:section>
+        <p14:section name="Pictures we can use" id="{F3923ABB-DC79-49BF-8F12-F017564C7A8E}">
+          <p14:sldIdLst>
+            <p14:sldId id="257"/>
+            <p14:sldId id="258"/>
+            <p14:sldId id="259"/>
+            <p14:sldId id="260"/>
+            <p14:sldId id="261"/>
+            <p14:sldId id="262"/>
+            <p14:sldId id="263"/>
+            <p14:sldId id="264"/>
+            <p14:sldId id="265"/>
+            <p14:sldId id="266"/>
+            <p14:sldId id="268"/>
+            <p14:sldId id="269"/>
+            <p14:sldId id="270"/>
+          </p14:sldIdLst>
+        </p14:section>
+      </p14:sectionLst>
+    </p:ext>
     <p:ext uri="{EFAFB233-063F-42B5-8137-9DF3F51BA10A}">
       <p15:sldGuideLst xmlns:p15="http://schemas.microsoft.com/office/powerpoint/2012/main">
         <p15:guide id="1" orient="horz" pos="2160">
@@ -150,7 +184,7 @@
 <file path=ppt/revisionInfo.xml><?xml version="1.0" encoding="utf-8"?>
 <p1510:revInfo xmlns:a="http://schemas.openxmlformats.org/drawingml/2006/main" xmlns:r="http://schemas.openxmlformats.org/officeDocument/2006/relationships" xmlns:p1510="http://schemas.microsoft.com/office/powerpoint/2015/10/main">
   <p1510:revLst>
-    <p1510:client id="{55725B31-4962-41AA-844B-8672FCF03F15}" v="1" dt="2026-06-09T07:57:26.671"/>
+    <p1510:client id="{55725B31-4962-41AA-844B-8672FCF03F15}" v="26" dt="2026-06-09T09:18:23.358"/>
   </p1510:revLst>
 </p1510:revInfo>
 </file>
@@ -159,19 +193,27 @@
 <pc:chgInfo xmlns:a="http://schemas.openxmlformats.org/drawingml/2006/main" xmlns:r="http://schemas.openxmlformats.org/officeDocument/2006/relationships" xmlns:ac="http://schemas.microsoft.com/office/drawing/2013/main/command" xmlns:pc="http://schemas.microsoft.com/office/powerpoint/2013/main/command">
   <pc:docChgLst>
     <pc:chgData name="Christina Knes" userId="7e9737a164333dbd" providerId="LiveId" clId="{72053980-4108-4AED-A5B7-3290F7F82C69}"/>
-    <pc:docChg chg="custSel modSld">
-      <pc:chgData name="Christina Knes" userId="7e9737a164333dbd" providerId="LiveId" clId="{72053980-4108-4AED-A5B7-3290F7F82C69}" dt="2026-06-09T07:59:16.993" v="176" actId="20577"/>
+    <pc:docChg chg="undo custSel addSld delSld modSld sldOrd addSection modSection">
+      <pc:chgData name="Christina Knes" userId="7e9737a164333dbd" providerId="LiveId" clId="{72053980-4108-4AED-A5B7-3290F7F82C69}" dt="2026-06-09T09:24:53.590" v="951" actId="20577"/>
       <pc:docMkLst>
         <pc:docMk/>
       </pc:docMkLst>
-      <pc:sldChg chg="modSp mod">
-        <pc:chgData name="Christina Knes" userId="7e9737a164333dbd" providerId="LiveId" clId="{72053980-4108-4AED-A5B7-3290F7F82C69}" dt="2026-06-09T07:47:09.089" v="2" actId="14100"/>
+      <pc:sldChg chg="modSp del mod">
+        <pc:chgData name="Christina Knes" userId="7e9737a164333dbd" providerId="LiveId" clId="{72053980-4108-4AED-A5B7-3290F7F82C69}" dt="2026-06-09T09:09:34.962" v="481" actId="2696"/>
         <pc:sldMkLst>
           <pc:docMk/>
           <pc:sldMk cId="0" sldId="256"/>
         </pc:sldMkLst>
+        <pc:spChg chg="mod">
+          <ac:chgData name="Christina Knes" userId="7e9737a164333dbd" providerId="LiveId" clId="{72053980-4108-4AED-A5B7-3290F7F82C69}" dt="2026-06-09T08:53:52.863" v="300" actId="403"/>
+          <ac:spMkLst>
+            <pc:docMk/>
+            <pc:sldMk cId="0" sldId="256"/>
+            <ac:spMk id="6" creationId="{00000000-0000-0000-0000-000000000000}"/>
+          </ac:spMkLst>
+        </pc:spChg>
         <pc:grpChg chg="mod">
-          <ac:chgData name="Christina Knes" userId="7e9737a164333dbd" providerId="LiveId" clId="{72053980-4108-4AED-A5B7-3290F7F82C69}" dt="2026-06-09T07:47:09.089" v="2" actId="14100"/>
+          <ac:chgData name="Christina Knes" userId="7e9737a164333dbd" providerId="LiveId" clId="{72053980-4108-4AED-A5B7-3290F7F82C69}" dt="2026-06-09T08:53:40.470" v="296" actId="1076"/>
           <ac:grpSpMkLst>
             <pc:docMk/>
             <pc:sldMk cId="0" sldId="256"/>
@@ -202,12 +244,20 @@
           </ac:grpSpMkLst>
         </pc:grpChg>
       </pc:sldChg>
-      <pc:sldChg chg="delSp mod">
-        <pc:chgData name="Christina Knes" userId="7e9737a164333dbd" providerId="LiveId" clId="{72053980-4108-4AED-A5B7-3290F7F82C69}" dt="2026-06-09T07:47:18.946" v="4" actId="478"/>
+      <pc:sldChg chg="addSp delSp modSp mod">
+        <pc:chgData name="Christina Knes" userId="7e9737a164333dbd" providerId="LiveId" clId="{72053980-4108-4AED-A5B7-3290F7F82C69}" dt="2026-06-09T09:09:30.130" v="480"/>
         <pc:sldMkLst>
           <pc:docMk/>
           <pc:sldMk cId="0" sldId="258"/>
         </pc:sldMkLst>
+        <pc:spChg chg="add mod">
+          <ac:chgData name="Christina Knes" userId="7e9737a164333dbd" providerId="LiveId" clId="{72053980-4108-4AED-A5B7-3290F7F82C69}" dt="2026-06-09T09:09:30.130" v="480"/>
+          <ac:spMkLst>
+            <pc:docMk/>
+            <pc:sldMk cId="0" sldId="258"/>
+            <ac:spMk id="3" creationId="{73FDB8E4-7690-34A1-B34D-84F95D11197D}"/>
+          </ac:spMkLst>
+        </pc:spChg>
         <pc:grpChg chg="del">
           <ac:chgData name="Christina Knes" userId="7e9737a164333dbd" providerId="LiveId" clId="{72053980-4108-4AED-A5B7-3290F7F82C69}" dt="2026-06-09T07:47:18.946" v="4" actId="478"/>
           <ac:grpSpMkLst>
@@ -337,12 +387,44 @@
           </ac:grpSpMkLst>
         </pc:grpChg>
       </pc:sldChg>
-      <pc:sldChg chg="delSp mod">
-        <pc:chgData name="Christina Knes" userId="7e9737a164333dbd" providerId="LiveId" clId="{72053980-4108-4AED-A5B7-3290F7F82C69}" dt="2026-06-09T07:47:40.160" v="13" actId="478"/>
+      <pc:sldChg chg="addSp delSp modSp mod ord">
+        <pc:chgData name="Christina Knes" userId="7e9737a164333dbd" providerId="LiveId" clId="{72053980-4108-4AED-A5B7-3290F7F82C69}" dt="2026-06-09T09:08:40.622" v="479" actId="1076"/>
         <pc:sldMkLst>
           <pc:docMk/>
           <pc:sldMk cId="0" sldId="267"/>
         </pc:sldMkLst>
+        <pc:spChg chg="add mod">
+          <ac:chgData name="Christina Knes" userId="7e9737a164333dbd" providerId="LiveId" clId="{72053980-4108-4AED-A5B7-3290F7F82C69}" dt="2026-06-09T09:08:29.752" v="478" actId="1076"/>
+          <ac:spMkLst>
+            <pc:docMk/>
+            <pc:sldMk cId="0" sldId="267"/>
+            <ac:spMk id="3" creationId="{544E612F-67B2-D86D-EC5E-180C32037383}"/>
+          </ac:spMkLst>
+        </pc:spChg>
+        <pc:spChg chg="add mod">
+          <ac:chgData name="Christina Knes" userId="7e9737a164333dbd" providerId="LiveId" clId="{72053980-4108-4AED-A5B7-3290F7F82C69}" dt="2026-06-09T09:08:22.922" v="477" actId="1076"/>
+          <ac:spMkLst>
+            <pc:docMk/>
+            <pc:sldMk cId="0" sldId="267"/>
+            <ac:spMk id="4" creationId="{EE14A9CE-6968-670A-5915-39B744948801}"/>
+          </ac:spMkLst>
+        </pc:spChg>
+        <pc:spChg chg="add del mod">
+          <ac:chgData name="Christina Knes" userId="7e9737a164333dbd" providerId="LiveId" clId="{72053980-4108-4AED-A5B7-3290F7F82C69}" dt="2026-06-09T08:57:22.540" v="357"/>
+          <ac:spMkLst>
+            <pc:docMk/>
+            <pc:sldMk cId="0" sldId="267"/>
+            <ac:spMk id="5" creationId="{472299A9-288B-3DB1-61B6-C61016E0965C}"/>
+          </ac:spMkLst>
+        </pc:spChg>
+        <pc:spChg chg="add mod">
+          <ac:chgData name="Christina Knes" userId="7e9737a164333dbd" providerId="LiveId" clId="{72053980-4108-4AED-A5B7-3290F7F82C69}" dt="2026-06-09T09:08:40.622" v="479" actId="1076"/>
+          <ac:spMkLst>
+            <pc:docMk/>
+            <pc:sldMk cId="0" sldId="267"/>
+            <ac:spMk id="6" creationId="{8336465B-C739-E720-C6C3-9572C15F98F5}"/>
+          </ac:spMkLst>
+        </pc:spChg>
         <pc:grpChg chg="del">
           <ac:chgData name="Christina Knes" userId="7e9737a164333dbd" providerId="LiveId" clId="{72053980-4108-4AED-A5B7-3290F7F82C69}" dt="2026-06-09T07:47:40.160" v="13" actId="478"/>
           <ac:grpSpMkLst>
@@ -351,6 +433,14 @@
             <ac:grpSpMk id="3" creationId="{00000000-0000-0000-0000-000000000000}"/>
           </ac:grpSpMkLst>
         </pc:grpChg>
+        <pc:picChg chg="add mod">
+          <ac:chgData name="Christina Knes" userId="7e9737a164333dbd" providerId="LiveId" clId="{72053980-4108-4AED-A5B7-3290F7F82C69}" dt="2026-06-09T09:08:12.663" v="476" actId="1076"/>
+          <ac:picMkLst>
+            <pc:docMk/>
+            <pc:sldMk cId="0" sldId="267"/>
+            <ac:picMk id="2050" creationId="{FE1E4CFA-B9D9-4015-CE71-F5D42DE47BC0}"/>
+          </ac:picMkLst>
+        </pc:picChg>
       </pc:sldChg>
       <pc:sldChg chg="delSp mod">
         <pc:chgData name="Christina Knes" userId="7e9737a164333dbd" providerId="LiveId" clId="{72053980-4108-4AED-A5B7-3290F7F82C69}" dt="2026-06-09T07:47:42.004" v="14" actId="478"/>
@@ -367,12 +457,20 @@
           </ac:grpSpMkLst>
         </pc:grpChg>
       </pc:sldChg>
-      <pc:sldChg chg="delSp mod">
-        <pc:chgData name="Christina Knes" userId="7e9737a164333dbd" providerId="LiveId" clId="{72053980-4108-4AED-A5B7-3290F7F82C69}" dt="2026-06-09T07:47:43.832" v="15" actId="478"/>
+      <pc:sldChg chg="addSp delSp modSp mod">
+        <pc:chgData name="Christina Knes" userId="7e9737a164333dbd" providerId="LiveId" clId="{72053980-4108-4AED-A5B7-3290F7F82C69}" dt="2026-06-09T09:02:48.280" v="429"/>
         <pc:sldMkLst>
           <pc:docMk/>
           <pc:sldMk cId="0" sldId="269"/>
         </pc:sldMkLst>
+        <pc:spChg chg="add mod">
+          <ac:chgData name="Christina Knes" userId="7e9737a164333dbd" providerId="LiveId" clId="{72053980-4108-4AED-A5B7-3290F7F82C69}" dt="2026-06-09T09:02:48.280" v="429"/>
+          <ac:spMkLst>
+            <pc:docMk/>
+            <pc:sldMk cId="0" sldId="269"/>
+            <ac:spMk id="3" creationId="{00000000-0000-0000-0000-000000000000}"/>
+          </ac:spMkLst>
+        </pc:spChg>
         <pc:grpChg chg="del">
           <ac:chgData name="Christina Knes" userId="7e9737a164333dbd" providerId="LiveId" clId="{72053980-4108-4AED-A5B7-3290F7F82C69}" dt="2026-06-09T07:47:43.832" v="15" actId="478"/>
           <ac:grpSpMkLst>
@@ -382,20 +480,155 @@
           </ac:grpSpMkLst>
         </pc:grpChg>
       </pc:sldChg>
-      <pc:sldChg chg="modSp mod">
-        <pc:chgData name="Christina Knes" userId="7e9737a164333dbd" providerId="LiveId" clId="{72053980-4108-4AED-A5B7-3290F7F82C69}" dt="2026-06-09T07:47:57.032" v="17" actId="14100"/>
+      <pc:sldChg chg="addSp delSp modSp mod">
+        <pc:chgData name="Christina Knes" userId="7e9737a164333dbd" providerId="LiveId" clId="{72053980-4108-4AED-A5B7-3290F7F82C69}" dt="2026-06-09T09:07:01.658" v="471" actId="1076"/>
         <pc:sldMkLst>
           <pc:docMk/>
           <pc:sldMk cId="0" sldId="270"/>
         </pc:sldMkLst>
+        <pc:spChg chg="del">
+          <ac:chgData name="Christina Knes" userId="7e9737a164333dbd" providerId="LiveId" clId="{72053980-4108-4AED-A5B7-3290F7F82C69}" dt="2026-06-09T09:02:46.018" v="428" actId="21"/>
+          <ac:spMkLst>
+            <pc:docMk/>
+            <pc:sldMk cId="0" sldId="270"/>
+            <ac:spMk id="2" creationId="{00000000-0000-0000-0000-000000000000}"/>
+          </ac:spMkLst>
+        </pc:spChg>
+        <pc:spChg chg="mod">
+          <ac:chgData name="Christina Knes" userId="7e9737a164333dbd" providerId="LiveId" clId="{72053980-4108-4AED-A5B7-3290F7F82C69}" dt="2026-06-09T09:06:24.037" v="469" actId="14100"/>
+          <ac:spMkLst>
+            <pc:docMk/>
+            <pc:sldMk cId="0" sldId="270"/>
+            <ac:spMk id="6" creationId="{00000000-0000-0000-0000-000000000000}"/>
+          </ac:spMkLst>
+        </pc:spChg>
+        <pc:spChg chg="mod">
+          <ac:chgData name="Christina Knes" userId="7e9737a164333dbd" providerId="LiveId" clId="{72053980-4108-4AED-A5B7-3290F7F82C69}" dt="2026-06-09T09:04:14.496" v="440" actId="1076"/>
+          <ac:spMkLst>
+            <pc:docMk/>
+            <pc:sldMk cId="0" sldId="270"/>
+            <ac:spMk id="7" creationId="{00000000-0000-0000-0000-000000000000}"/>
+          </ac:spMkLst>
+        </pc:spChg>
+        <pc:spChg chg="add">
+          <ac:chgData name="Christina Knes" userId="7e9737a164333dbd" providerId="LiveId" clId="{72053980-4108-4AED-A5B7-3290F7F82C69}" dt="2026-06-09T09:02:40.787" v="426"/>
+          <ac:spMkLst>
+            <pc:docMk/>
+            <pc:sldMk cId="0" sldId="270"/>
+            <ac:spMk id="8" creationId="{239DAADD-B78C-E4A7-66BF-100774F51144}"/>
+          </ac:spMkLst>
+        </pc:spChg>
+        <pc:spChg chg="mod">
+          <ac:chgData name="Christina Knes" userId="7e9737a164333dbd" providerId="LiveId" clId="{72053980-4108-4AED-A5B7-3290F7F82C69}" dt="2026-06-09T09:03:59.305" v="438" actId="571"/>
+          <ac:spMkLst>
+            <pc:docMk/>
+            <pc:sldMk cId="0" sldId="270"/>
+            <ac:spMk id="12" creationId="{3AAB4316-487B-DAD0-25ED-E2C558729104}"/>
+          </ac:spMkLst>
+        </pc:spChg>
+        <pc:spChg chg="mod">
+          <ac:chgData name="Christina Knes" userId="7e9737a164333dbd" providerId="LiveId" clId="{72053980-4108-4AED-A5B7-3290F7F82C69}" dt="2026-06-09T09:03:59.305" v="438" actId="571"/>
+          <ac:spMkLst>
+            <pc:docMk/>
+            <pc:sldMk cId="0" sldId="270"/>
+            <ac:spMk id="13" creationId="{7D20C6FD-69D4-768C-7D85-62251C85EDC3}"/>
+          </ac:spMkLst>
+        </pc:spChg>
+        <pc:spChg chg="add mod">
+          <ac:chgData name="Christina Knes" userId="7e9737a164333dbd" providerId="LiveId" clId="{72053980-4108-4AED-A5B7-3290F7F82C69}" dt="2026-06-09T09:05:53.350" v="468" actId="1076"/>
+          <ac:spMkLst>
+            <pc:docMk/>
+            <pc:sldMk cId="0" sldId="270"/>
+            <ac:spMk id="16" creationId="{0396B072-1AA0-6997-A261-3D2BBCA71521}"/>
+          </ac:spMkLst>
+        </pc:spChg>
         <pc:grpChg chg="mod">
-          <ac:chgData name="Christina Knes" userId="7e9737a164333dbd" providerId="LiveId" clId="{72053980-4108-4AED-A5B7-3290F7F82C69}" dt="2026-06-09T07:47:57.032" v="17" actId="14100"/>
+          <ac:chgData name="Christina Knes" userId="7e9737a164333dbd" providerId="LiveId" clId="{72053980-4108-4AED-A5B7-3290F7F82C69}" dt="2026-06-09T09:07:01.658" v="471" actId="1076"/>
           <ac:grpSpMkLst>
             <pc:docMk/>
             <pc:sldMk cId="0" sldId="270"/>
             <ac:grpSpMk id="3" creationId="{00000000-0000-0000-0000-000000000000}"/>
           </ac:grpSpMkLst>
         </pc:grpChg>
+        <pc:grpChg chg="add mod">
+          <ac:chgData name="Christina Knes" userId="7e9737a164333dbd" providerId="LiveId" clId="{72053980-4108-4AED-A5B7-3290F7F82C69}" dt="2026-06-09T09:03:59.305" v="438" actId="571"/>
+          <ac:grpSpMkLst>
+            <pc:docMk/>
+            <pc:sldMk cId="0" sldId="270"/>
+            <ac:grpSpMk id="11" creationId="{0E148A4E-0E69-5D2B-490C-52A2E7CA743F}"/>
+          </ac:grpSpMkLst>
+        </pc:grpChg>
+        <pc:picChg chg="add del mod">
+          <ac:chgData name="Christina Knes" userId="7e9737a164333dbd" providerId="LiveId" clId="{72053980-4108-4AED-A5B7-3290F7F82C69}" dt="2026-06-09T09:04:43.725" v="441" actId="478"/>
+          <ac:picMkLst>
+            <pc:docMk/>
+            <pc:sldMk cId="0" sldId="270"/>
+            <ac:picMk id="10" creationId="{EA80687B-5EFE-88F7-7152-E29E0B34DEE0}"/>
+          </ac:picMkLst>
+        </pc:picChg>
+        <pc:picChg chg="add mod">
+          <ac:chgData name="Christina Knes" userId="7e9737a164333dbd" providerId="LiveId" clId="{72053980-4108-4AED-A5B7-3290F7F82C69}" dt="2026-06-09T09:05:00.213" v="444" actId="1076"/>
+          <ac:picMkLst>
+            <pc:docMk/>
+            <pc:sldMk cId="0" sldId="270"/>
+            <ac:picMk id="15" creationId="{70694901-97D3-73F7-3D3B-E6DBFD91B8A2}"/>
+          </ac:picMkLst>
+        </pc:picChg>
+      </pc:sldChg>
+      <pc:sldChg chg="addSp delSp modSp add mod">
+        <pc:chgData name="Christina Knes" userId="7e9737a164333dbd" providerId="LiveId" clId="{72053980-4108-4AED-A5B7-3290F7F82C69}" dt="2026-06-09T09:24:53.590" v="951" actId="20577"/>
+        <pc:sldMkLst>
+          <pc:docMk/>
+          <pc:sldMk cId="3676627759" sldId="271"/>
+        </pc:sldMkLst>
+        <pc:spChg chg="del">
+          <ac:chgData name="Christina Knes" userId="7e9737a164333dbd" providerId="LiveId" clId="{72053980-4108-4AED-A5B7-3290F7F82C69}" dt="2026-06-09T09:10:33.089" v="492" actId="478"/>
+          <ac:spMkLst>
+            <pc:docMk/>
+            <pc:sldMk cId="3676627759" sldId="271"/>
+            <ac:spMk id="2" creationId="{52BEA6B9-AC22-83DC-8B01-5387186B23B3}"/>
+          </ac:spMkLst>
+        </pc:spChg>
+        <pc:spChg chg="del">
+          <ac:chgData name="Christina Knes" userId="7e9737a164333dbd" providerId="LiveId" clId="{72053980-4108-4AED-A5B7-3290F7F82C69}" dt="2026-06-09T09:10:23.036" v="487" actId="478"/>
+          <ac:spMkLst>
+            <pc:docMk/>
+            <pc:sldMk cId="3676627759" sldId="271"/>
+            <ac:spMk id="3" creationId="{B063A668-7DEA-3239-7F64-FA258BAC0B23}"/>
+          </ac:spMkLst>
+        </pc:spChg>
+        <pc:spChg chg="add mod">
+          <ac:chgData name="Christina Knes" userId="7e9737a164333dbd" providerId="LiveId" clId="{72053980-4108-4AED-A5B7-3290F7F82C69}" dt="2026-06-09T09:24:43.749" v="943" actId="1076"/>
+          <ac:spMkLst>
+            <pc:docMk/>
+            <pc:sldMk cId="3676627759" sldId="271"/>
+            <ac:spMk id="6" creationId="{C514BB90-57BA-AFE6-AC1F-FEC4247F25E6}"/>
+          </ac:spMkLst>
+        </pc:spChg>
+        <pc:spChg chg="add mod">
+          <ac:chgData name="Christina Knes" userId="7e9737a164333dbd" providerId="LiveId" clId="{72053980-4108-4AED-A5B7-3290F7F82C69}" dt="2026-06-09T09:24:53.590" v="951" actId="20577"/>
+          <ac:spMkLst>
+            <pc:docMk/>
+            <pc:sldMk cId="3676627759" sldId="271"/>
+            <ac:spMk id="7" creationId="{40FE6B35-91C6-D113-ACDE-04E07AA4783A}"/>
+          </ac:spMkLst>
+        </pc:spChg>
+        <pc:spChg chg="add mod">
+          <ac:chgData name="Christina Knes" userId="7e9737a164333dbd" providerId="LiveId" clId="{72053980-4108-4AED-A5B7-3290F7F82C69}" dt="2026-06-09T09:23:27.676" v="937" actId="20577"/>
+          <ac:spMkLst>
+            <pc:docMk/>
+            <pc:sldMk cId="3676627759" sldId="271"/>
+            <ac:spMk id="8" creationId="{83C2C069-AA71-5C06-E494-E4B061CC408E}"/>
+          </ac:spMkLst>
+        </pc:spChg>
+        <pc:picChg chg="add mod">
+          <ac:chgData name="Christina Knes" userId="7e9737a164333dbd" providerId="LiveId" clId="{72053980-4108-4AED-A5B7-3290F7F82C69}" dt="2026-06-09T09:16:05.217" v="545" actId="2085"/>
+          <ac:picMkLst>
+            <pc:docMk/>
+            <pc:sldMk cId="3676627759" sldId="271"/>
+            <ac:picMk id="5" creationId="{77A5E288-C61E-B3FC-2136-360FDFA4C6A3}"/>
+          </ac:picMkLst>
+        </pc:picChg>
       </pc:sldChg>
     </pc:docChg>
   </pc:docChgLst>
@@ -3319,14 +3552,6 @@
 <file path=ppt/slides/slide1.xml><?xml version="1.0" encoding="utf-8"?>
 <p:sld xmlns:a="http://schemas.openxmlformats.org/drawingml/2006/main" xmlns:r="http://schemas.openxmlformats.org/officeDocument/2006/relationships" xmlns:p="http://schemas.openxmlformats.org/presentationml/2006/main">
   <p:cSld>
-    <p:bg>
-      <p:bgPr>
-        <a:solidFill>
-          <a:srgbClr val="FFD4A6"/>
-        </a:solidFill>
-        <a:effectLst/>
-      </p:bgPr>
-    </p:bg>
     <p:spTree>
       <p:nvGrpSpPr>
         <p:cNvPr id="1" name=""/>
@@ -3349,8 +3574,8 @@
         </p:nvSpPr>
         <p:spPr>
           <a:xfrm>
-            <a:off x="2264376" y="1020977"/>
-            <a:ext cx="4948047" cy="8229600"/>
+            <a:off x="632461" y="3969270"/>
+            <a:ext cx="7729481" cy="5893729"/>
           </a:xfrm>
           <a:custGeom>
             <a:avLst/>
@@ -3359,18 +3584,18 @@
             <a:cxnLst/>
             <a:rect l="l" t="t" r="r" b="b"/>
             <a:pathLst>
-              <a:path w="4948047" h="8229600">
+              <a:path w="7729481" h="5893729">
                 <a:moveTo>
                   <a:pt x="0" y="0"/>
                 </a:moveTo>
                 <a:lnTo>
-                  <a:pt x="4948047" y="0"/>
-                </a:lnTo>
-                <a:lnTo>
-                  <a:pt x="4948047" y="8229600"/>
-                </a:lnTo>
-                <a:lnTo>
-                  <a:pt x="0" y="8229600"/>
+                  <a:pt x="7729481" y="0"/>
+                </a:lnTo>
+                <a:lnTo>
+                  <a:pt x="7729481" y="5893729"/>
+                </a:lnTo>
+                <a:lnTo>
+                  <a:pt x="0" y="5893729"/>
                 </a:lnTo>
                 <a:lnTo>
                   <a:pt x="0" y="0"/>
@@ -3400,185 +3625,201 @@
           </a:p>
         </p:txBody>
       </p:sp>
-      <p:grpSp>
-        <p:nvGrpSpPr>
-          <p:cNvPr id="3" name="Group 3"/>
-          <p:cNvGrpSpPr/>
-          <p:nvPr/>
-        </p:nvGrpSpPr>
-        <p:grpSpPr>
-          <a:xfrm>
-            <a:off x="9144000" y="1"/>
-            <a:ext cx="9144000" cy="10287000"/>
-            <a:chOff x="0" y="0"/>
-            <a:chExt cx="2570205" cy="2899719"/>
-          </a:xfrm>
-        </p:grpSpPr>
-        <p:sp>
-          <p:nvSpPr>
-            <p:cNvPr id="4" name="Freeform 4"/>
-            <p:cNvSpPr/>
-            <p:nvPr/>
-          </p:nvSpPr>
-          <p:spPr>
-            <a:xfrm>
-              <a:off x="0" y="0"/>
-              <a:ext cx="2570205" cy="2899719"/>
-            </a:xfrm>
-            <a:custGeom>
-              <a:avLst/>
-              <a:gdLst/>
-              <a:ahLst/>
-              <a:cxnLst/>
-              <a:rect l="l" t="t" r="r" b="b"/>
-              <a:pathLst>
-                <a:path w="2570205" h="2899719">
-                  <a:moveTo>
-                    <a:pt x="0" y="0"/>
-                  </a:moveTo>
-                  <a:lnTo>
-                    <a:pt x="2570205" y="0"/>
-                  </a:lnTo>
-                  <a:lnTo>
-                    <a:pt x="2570205" y="2899719"/>
-                  </a:lnTo>
-                  <a:lnTo>
-                    <a:pt x="0" y="2899719"/>
-                  </a:lnTo>
-                  <a:close/>
-                </a:path>
-              </a:pathLst>
-            </a:custGeom>
-            <a:solidFill>
-              <a:srgbClr val="97A2DD"/>
-            </a:solidFill>
-            <a:ln w="28575" cap="sq">
-              <a:solidFill>
-                <a:srgbClr val="000000"/>
-              </a:solidFill>
-              <a:prstDash val="solid"/>
-              <a:miter/>
-            </a:ln>
-          </p:spPr>
-          <p:txBody>
-            <a:bodyPr/>
-            <a:lstStyle/>
-            <a:p>
-              <a:endParaRPr lang="de-AT"/>
-            </a:p>
-          </p:txBody>
-        </p:sp>
-        <p:sp>
-          <p:nvSpPr>
-            <p:cNvPr id="5" name="TextBox 5"/>
-            <p:cNvSpPr txBox="1"/>
-            <p:nvPr/>
-          </p:nvSpPr>
-          <p:spPr>
-            <a:xfrm>
-              <a:off x="0" y="-38100"/>
-              <a:ext cx="2570205" cy="2937819"/>
-            </a:xfrm>
-            <a:prstGeom prst="rect">
-              <a:avLst/>
-            </a:prstGeom>
-          </p:spPr>
-          <p:txBody>
-            <a:bodyPr lIns="50800" tIns="50800" rIns="50800" bIns="50800" rtlCol="0" anchor="ctr"/>
-            <a:lstStyle/>
-            <a:p>
-              <a:pPr algn="ctr">
-                <a:lnSpc>
-                  <a:spcPts val="2659"/>
-                </a:lnSpc>
-              </a:pPr>
-              <a:endParaRPr/>
-            </a:p>
-          </p:txBody>
-        </p:sp>
-      </p:grpSp>
-      <p:sp>
-        <p:nvSpPr>
-          <p:cNvPr id="6" name="TextBox 6"/>
+      <p:sp>
+        <p:nvSpPr>
+          <p:cNvPr id="3" name="TextBox 6">
+            <a:extLst>
+              <a:ext uri="{FF2B5EF4-FFF2-40B4-BE49-F238E27FC236}">
+                <a16:creationId xmlns:a16="http://schemas.microsoft.com/office/drawing/2014/main" id="{544E612F-67B2-D86D-EC5E-180C32037383}"/>
+              </a:ext>
+            </a:extLst>
+          </p:cNvPr>
           <p:cNvSpPr txBox="1"/>
           <p:nvPr/>
         </p:nvSpPr>
         <p:spPr>
           <a:xfrm>
-            <a:off x="10258669" y="-59724"/>
-            <a:ext cx="6614482" cy="8055354"/>
+            <a:off x="1325877" y="760699"/>
+            <a:ext cx="15636240" cy="2769989"/>
           </a:xfrm>
           <a:prstGeom prst="rect">
             <a:avLst/>
           </a:prstGeom>
         </p:spPr>
         <p:txBody>
-          <a:bodyPr lIns="0" tIns="0" rIns="0" bIns="0" rtlCol="0" anchor="t">
+          <a:bodyPr wrap="square" lIns="0" tIns="0" rIns="0" bIns="0" rtlCol="0" anchor="t">
             <a:spAutoFit/>
           </a:bodyPr>
           <a:lstStyle/>
           <a:p>
-            <a:pPr algn="ctr">
-              <a:lnSpc>
-                <a:spcPts val="65779"/>
-              </a:lnSpc>
-            </a:pPr>
-            <a:r>
-              <a:rPr lang="en-US" sz="46985" dirty="0">
-                <a:solidFill>
-                  <a:srgbClr val="FFFFFF"/>
-                </a:solidFill>
+            <a:pPr algn="ctr"/>
+            <a:r>
+              <a:rPr lang="en-US" sz="6000" dirty="0">
                 <a:latin typeface="Fredoka"/>
                 <a:ea typeface="Fredoka"/>
                 <a:cs typeface="Fredoka"/>
                 <a:sym typeface="Fredoka"/>
               </a:rPr>
-              <a:t>AI</a:t>
-            </a:r>
-          </a:p>
-        </p:txBody>
-      </p:sp>
-      <p:sp>
-        <p:nvSpPr>
-          <p:cNvPr id="7" name="TextBox 7"/>
-          <p:cNvSpPr txBox="1"/>
-          <p:nvPr/>
-        </p:nvSpPr>
-        <p:spPr>
-          <a:xfrm>
-            <a:off x="10441029" y="8189575"/>
-            <a:ext cx="6249762" cy="1068725"/>
-          </a:xfrm>
-          <a:prstGeom prst="rect">
-            <a:avLst/>
-          </a:prstGeom>
-        </p:spPr>
-        <p:txBody>
-          <a:bodyPr lIns="0" tIns="0" rIns="0" bIns="0" rtlCol="0" anchor="t">
-            <a:spAutoFit/>
-          </a:bodyPr>
-          <a:lstStyle/>
-          <a:p>
-            <a:pPr algn="ctr">
-              <a:lnSpc>
-                <a:spcPts val="8716"/>
-              </a:lnSpc>
-            </a:pPr>
-            <a:r>
-              <a:rPr lang="en-US" sz="6226">
-                <a:solidFill>
-                  <a:srgbClr val="000000"/>
-                </a:solidFill>
+              <a:t>Does ChatGPT enhance student learning? </a:t>
+            </a:r>
+            <a:br>
+              <a:rPr lang="en-US" sz="6000" dirty="0">
                 <a:latin typeface="Fredoka"/>
                 <a:ea typeface="Fredoka"/>
                 <a:cs typeface="Fredoka"/>
                 <a:sym typeface="Fredoka"/>
               </a:rPr>
-              <a:t>IN EDUCATION</a:t>
-            </a:r>
-          </a:p>
-        </p:txBody>
-      </p:sp>
+            </a:br>
+            <a:r>
+              <a:rPr lang="en-US" sz="6000" dirty="0">
+                <a:latin typeface="Fredoka"/>
+                <a:ea typeface="Fredoka"/>
+                <a:cs typeface="Fredoka"/>
+                <a:sym typeface="Fredoka"/>
+              </a:rPr>
+              <a:t>A systematic review and meta-analysis of experimental studies</a:t>
+            </a:r>
+          </a:p>
+        </p:txBody>
+      </p:sp>
+      <p:sp>
+        <p:nvSpPr>
+          <p:cNvPr id="4" name="Textfeld 3">
+            <a:extLst>
+              <a:ext uri="{FF2B5EF4-FFF2-40B4-BE49-F238E27FC236}">
+                <a16:creationId xmlns:a16="http://schemas.microsoft.com/office/drawing/2014/main" id="{EE14A9CE-6968-670A-5915-39B744948801}"/>
+              </a:ext>
+            </a:extLst>
+          </p:cNvPr>
+          <p:cNvSpPr txBox="1"/>
+          <p:nvPr/>
+        </p:nvSpPr>
+        <p:spPr>
+          <a:xfrm>
+            <a:off x="5279257" y="3676882"/>
+            <a:ext cx="7729481" cy="584775"/>
+          </a:xfrm>
+          <a:prstGeom prst="rect">
+            <a:avLst/>
+          </a:prstGeom>
+          <a:noFill/>
+        </p:spPr>
+        <p:txBody>
+          <a:bodyPr wrap="square" rtlCol="0">
+            <a:spAutoFit/>
+          </a:bodyPr>
+          <a:lstStyle/>
+          <a:p>
+            <a:pPr algn="ctr"/>
+            <a:r>
+              <a:rPr lang="de-AT" sz="3200" dirty="0">
+                <a:latin typeface="Fredoka"/>
+              </a:rPr>
+              <a:t>Deng et al. (2024)</a:t>
+            </a:r>
+          </a:p>
+        </p:txBody>
+      </p:sp>
+      <p:sp>
+        <p:nvSpPr>
+          <p:cNvPr id="6" name="Textfeld 5">
+            <a:extLst>
+              <a:ext uri="{FF2B5EF4-FFF2-40B4-BE49-F238E27FC236}">
+                <a16:creationId xmlns:a16="http://schemas.microsoft.com/office/drawing/2014/main" id="{8336465B-C739-E720-C6C3-9572C15F98F5}"/>
+              </a:ext>
+            </a:extLst>
+          </p:cNvPr>
+          <p:cNvSpPr txBox="1"/>
+          <p:nvPr/>
+        </p:nvSpPr>
+        <p:spPr>
+          <a:xfrm>
+            <a:off x="11887200" y="8309316"/>
+            <a:ext cx="6172200" cy="1569660"/>
+          </a:xfrm>
+          <a:prstGeom prst="rect">
+            <a:avLst/>
+          </a:prstGeom>
+          <a:noFill/>
+        </p:spPr>
+        <p:txBody>
+          <a:bodyPr wrap="square" rtlCol="0">
+            <a:spAutoFit/>
+          </a:bodyPr>
+          <a:lstStyle/>
+          <a:p>
+            <a:r>
+              <a:rPr lang="de-AT" sz="3200" dirty="0">
+                <a:cs typeface="IrisUPC" panose="020B0502040204020203" pitchFamily="34" charset="-34"/>
+              </a:rPr>
+              <a:t>Maria Clara Escanuela dos Santos</a:t>
+            </a:r>
+          </a:p>
+          <a:p>
+            <a:r>
+              <a:rPr lang="de-AT" sz="3200" dirty="0">
+                <a:cs typeface="IrisUPC" panose="020B0502040204020203" pitchFamily="34" charset="-34"/>
+              </a:rPr>
+              <a:t>Marina Tatjana Hofer</a:t>
+            </a:r>
+          </a:p>
+          <a:p>
+            <a:r>
+              <a:rPr lang="de-AT" sz="3200" dirty="0">
+                <a:cs typeface="IrisUPC" panose="020B0502040204020203" pitchFamily="34" charset="-34"/>
+              </a:rPr>
+              <a:t>Christina Sophie Knes</a:t>
+            </a:r>
+          </a:p>
+        </p:txBody>
+      </p:sp>
+      <p:pic>
+        <p:nvPicPr>
+          <p:cNvPr id="2050" name="Picture 2" descr="Chatgpt logo Icon">
+            <a:extLst>
+              <a:ext uri="{FF2B5EF4-FFF2-40B4-BE49-F238E27FC236}">
+                <a16:creationId xmlns:a16="http://schemas.microsoft.com/office/drawing/2014/main" id="{FE1E4CFA-B9D9-4015-CE71-F5D42DE47BC0}"/>
+              </a:ext>
+            </a:extLst>
+          </p:cNvPr>
+          <p:cNvPicPr>
+            <a:picLocks noChangeAspect="1" noChangeArrowheads="1"/>
+          </p:cNvPicPr>
+          <p:nvPr/>
+        </p:nvPicPr>
+        <p:blipFill>
+          <a:blip r:embed="rId3">
+            <a:extLst>
+              <a:ext uri="{28A0092B-C50C-407E-A947-70E740481C1C}">
+                <a14:useLocalDpi xmlns:a14="http://schemas.microsoft.com/office/drawing/2010/main" val="0"/>
+              </a:ext>
+            </a:extLst>
+          </a:blip>
+          <a:srcRect/>
+          <a:stretch>
+            <a:fillRect/>
+          </a:stretch>
+        </p:blipFill>
+        <p:spPr bwMode="auto">
+          <a:xfrm>
+            <a:off x="2362200" y="6591300"/>
+            <a:ext cx="838200" cy="838200"/>
+          </a:xfrm>
+          <a:prstGeom prst="rect">
+            <a:avLst/>
+          </a:prstGeom>
+          <a:noFill/>
+          <a:extLst>
+            <a:ext uri="{909E8E84-426E-40DD-AFC4-6F175D3DCCD1}">
+              <a14:hiddenFill xmlns:a14="http://schemas.microsoft.com/office/drawing/2010/main">
+                <a:solidFill>
+                  <a:srgbClr val="FFFFFF"/>
+                </a:solidFill>
+              </a14:hiddenFill>
+            </a:ext>
+          </a:extLst>
+        </p:spPr>
+      </p:pic>
     </p:spTree>
   </p:cSld>
   <p:clrMapOvr>
@@ -3612,8 +3853,8 @@
         </p:nvSpPr>
         <p:spPr>
           <a:xfrm>
-            <a:off x="563209" y="936159"/>
-            <a:ext cx="5718216" cy="8780370"/>
+            <a:off x="10045217" y="2099566"/>
+            <a:ext cx="7574331" cy="6087869"/>
           </a:xfrm>
           <a:custGeom>
             <a:avLst/>
@@ -3622,18 +3863,18 @@
             <a:cxnLst/>
             <a:rect l="l" t="t" r="r" b="b"/>
             <a:pathLst>
-              <a:path w="5718216" h="8780370">
+              <a:path w="7574331" h="6087869">
                 <a:moveTo>
                   <a:pt x="0" y="0"/>
                 </a:moveTo>
                 <a:lnTo>
-                  <a:pt x="5718216" y="0"/>
-                </a:lnTo>
-                <a:lnTo>
-                  <a:pt x="5718216" y="8780370"/>
-                </a:lnTo>
-                <a:lnTo>
-                  <a:pt x="0" y="8780370"/>
+                  <a:pt x="7574331" y="0"/>
+                </a:lnTo>
+                <a:lnTo>
+                  <a:pt x="7574331" y="6087868"/>
+                </a:lnTo>
+                <a:lnTo>
+                  <a:pt x="0" y="6087868"/>
                 </a:lnTo>
                 <a:lnTo>
                   <a:pt x="0" y="0"/>
@@ -3696,8 +3937,8 @@
         </p:nvSpPr>
         <p:spPr>
           <a:xfrm>
-            <a:off x="10117835" y="1418265"/>
-            <a:ext cx="7357338" cy="7450469"/>
+            <a:off x="563209" y="936159"/>
+            <a:ext cx="5718216" cy="8780370"/>
           </a:xfrm>
           <a:custGeom>
             <a:avLst/>
@@ -3706,18 +3947,18 @@
             <a:cxnLst/>
             <a:rect l="l" t="t" r="r" b="b"/>
             <a:pathLst>
-              <a:path w="7357338" h="7450469">
+              <a:path w="5718216" h="8780370">
                 <a:moveTo>
                   <a:pt x="0" y="0"/>
                 </a:moveTo>
                 <a:lnTo>
-                  <a:pt x="7357338" y="0"/>
-                </a:lnTo>
-                <a:lnTo>
-                  <a:pt x="7357338" y="7450470"/>
-                </a:lnTo>
-                <a:lnTo>
-                  <a:pt x="0" y="7450470"/>
+                  <a:pt x="5718216" y="0"/>
+                </a:lnTo>
+                <a:lnTo>
+                  <a:pt x="5718216" y="8780370"/>
+                </a:lnTo>
+                <a:lnTo>
+                  <a:pt x="0" y="8780370"/>
                 </a:lnTo>
                 <a:lnTo>
                   <a:pt x="0" y="0"/>
@@ -3780,8 +4021,8 @@
         </p:nvSpPr>
         <p:spPr>
           <a:xfrm>
-            <a:off x="632461" y="3969270"/>
-            <a:ext cx="7729481" cy="5893729"/>
+            <a:off x="10117835" y="1418265"/>
+            <a:ext cx="7357338" cy="7450469"/>
           </a:xfrm>
           <a:custGeom>
             <a:avLst/>
@@ -3790,18 +4031,18 @@
             <a:cxnLst/>
             <a:rect l="l" t="t" r="r" b="b"/>
             <a:pathLst>
-              <a:path w="7729481" h="5893729">
+              <a:path w="7357338" h="7450469">
                 <a:moveTo>
                   <a:pt x="0" y="0"/>
                 </a:moveTo>
                 <a:lnTo>
-                  <a:pt x="7729481" y="0"/>
-                </a:lnTo>
-                <a:lnTo>
-                  <a:pt x="7729481" y="5893729"/>
-                </a:lnTo>
-                <a:lnTo>
-                  <a:pt x="0" y="5893729"/>
+                  <a:pt x="7357338" y="0"/>
+                </a:lnTo>
+                <a:lnTo>
+                  <a:pt x="7357338" y="7450470"/>
+                </a:lnTo>
+                <a:lnTo>
+                  <a:pt x="0" y="7450470"/>
                 </a:lnTo>
                 <a:lnTo>
                   <a:pt x="0" y="0"/>
@@ -3987,6 +4228,65 @@
           </a:p>
         </p:txBody>
       </p:sp>
+      <p:sp>
+        <p:nvSpPr>
+          <p:cNvPr id="3" name="Freeform 2"/>
+          <p:cNvSpPr/>
+          <p:nvPr/>
+        </p:nvSpPr>
+        <p:spPr>
+          <a:xfrm>
+            <a:off x="10182083" y="3168347"/>
+            <a:ext cx="7463366" cy="4851188"/>
+          </a:xfrm>
+          <a:custGeom>
+            <a:avLst/>
+            <a:gdLst/>
+            <a:ahLst/>
+            <a:cxnLst/>
+            <a:rect l="l" t="t" r="r" b="b"/>
+            <a:pathLst>
+              <a:path w="7463366" h="4851188">
+                <a:moveTo>
+                  <a:pt x="0" y="0"/>
+                </a:moveTo>
+                <a:lnTo>
+                  <a:pt x="7463366" y="0"/>
+                </a:lnTo>
+                <a:lnTo>
+                  <a:pt x="7463366" y="4851188"/>
+                </a:lnTo>
+                <a:lnTo>
+                  <a:pt x="0" y="4851188"/>
+                </a:lnTo>
+                <a:lnTo>
+                  <a:pt x="0" y="0"/>
+                </a:lnTo>
+                <a:close/>
+              </a:path>
+            </a:pathLst>
+          </a:custGeom>
+          <a:blipFill>
+            <a:blip>
+              <a:extLst>
+                <a:ext uri="{96DAC541-7B7A-43D3-8B79-37D633B846F1}">
+                  <asvg:svgBlip xmlns:asvg="http://schemas.microsoft.com/office/drawing/2016/SVG/main" r:embed="rId3"/>
+                </a:ext>
+              </a:extLst>
+            </a:blip>
+            <a:stretch>
+              <a:fillRect/>
+            </a:stretch>
+          </a:blipFill>
+        </p:spPr>
+        <p:txBody>
+          <a:bodyPr/>
+          <a:lstStyle/>
+          <a:p>
+            <a:endParaRPr lang="de-AT"/>
+          </a:p>
+        </p:txBody>
+      </p:sp>
     </p:spTree>
   </p:cSld>
   <p:clrMapOvr>
@@ -4012,65 +4312,6 @@
           <a:chExt cx="0" cy="0"/>
         </a:xfrm>
       </p:grpSpPr>
-      <p:sp>
-        <p:nvSpPr>
-          <p:cNvPr id="2" name="Freeform 2"/>
-          <p:cNvSpPr/>
-          <p:nvPr/>
-        </p:nvSpPr>
-        <p:spPr>
-          <a:xfrm>
-            <a:off x="10182083" y="3168347"/>
-            <a:ext cx="7463366" cy="4851188"/>
-          </a:xfrm>
-          <a:custGeom>
-            <a:avLst/>
-            <a:gdLst/>
-            <a:ahLst/>
-            <a:cxnLst/>
-            <a:rect l="l" t="t" r="r" b="b"/>
-            <a:pathLst>
-              <a:path w="7463366" h="4851188">
-                <a:moveTo>
-                  <a:pt x="0" y="0"/>
-                </a:moveTo>
-                <a:lnTo>
-                  <a:pt x="7463366" y="0"/>
-                </a:lnTo>
-                <a:lnTo>
-                  <a:pt x="7463366" y="4851188"/>
-                </a:lnTo>
-                <a:lnTo>
-                  <a:pt x="0" y="4851188"/>
-                </a:lnTo>
-                <a:lnTo>
-                  <a:pt x="0" y="0"/>
-                </a:lnTo>
-                <a:close/>
-              </a:path>
-            </a:pathLst>
-          </a:custGeom>
-          <a:blipFill>
-            <a:blip>
-              <a:extLst>
-                <a:ext uri="{96DAC541-7B7A-43D3-8B79-37D633B846F1}">
-                  <asvg:svgBlip xmlns:asvg="http://schemas.microsoft.com/office/drawing/2016/SVG/main" r:embed="rId2"/>
-                </a:ext>
-              </a:extLst>
-            </a:blip>
-            <a:stretch>
-              <a:fillRect/>
-            </a:stretch>
-          </a:blipFill>
-        </p:spPr>
-        <p:txBody>
-          <a:bodyPr/>
-          <a:lstStyle/>
-          <a:p>
-            <a:endParaRPr lang="de-AT"/>
-          </a:p>
-        </p:txBody>
-      </p:sp>
       <p:grpSp>
         <p:nvGrpSpPr>
           <p:cNvPr id="3" name="Group 3"/>
@@ -4176,15 +4417,15 @@
         </p:nvSpPr>
         <p:spPr>
           <a:xfrm>
-            <a:off x="1028700" y="839829"/>
-            <a:ext cx="6966527" cy="3804156"/>
+            <a:off x="1069785" y="2324100"/>
+            <a:ext cx="7617015" cy="3804156"/>
           </a:xfrm>
           <a:prstGeom prst="rect">
             <a:avLst/>
           </a:prstGeom>
         </p:spPr>
         <p:txBody>
-          <a:bodyPr lIns="0" tIns="0" rIns="0" bIns="0" rtlCol="0" anchor="t">
+          <a:bodyPr wrap="square" lIns="0" tIns="0" rIns="0" bIns="0" rtlCol="0" anchor="t">
             <a:spAutoFit/>
           </a:bodyPr>
           <a:lstStyle/>
@@ -4195,7 +4436,7 @@
               </a:lnSpc>
             </a:pPr>
             <a:r>
-              <a:rPr lang="en-US" sz="10908">
+              <a:rPr lang="en-US" sz="10908" dirty="0">
                 <a:solidFill>
                   <a:srgbClr val="000000"/>
                 </a:solidFill>
@@ -4214,7 +4455,7 @@
               </a:lnSpc>
             </a:pPr>
             <a:r>
-              <a:rPr lang="en-US" sz="10908">
+              <a:rPr lang="en-US" sz="10908" dirty="0">
                 <a:solidFill>
                   <a:srgbClr val="000000"/>
                 </a:solidFill>
@@ -4223,7 +4464,7 @@
                 <a:cs typeface="Fredoka"/>
                 <a:sym typeface="Fredoka"/>
               </a:rPr>
-              <a:t>YOU</a:t>
+              <a:t>YOU!</a:t>
             </a:r>
           </a:p>
         </p:txBody>
@@ -4236,7 +4477,7 @@
         </p:nvSpPr>
         <p:spPr>
           <a:xfrm>
-            <a:off x="1028700" y="5191125"/>
+            <a:off x="1069785" y="6628829"/>
             <a:ext cx="7281649" cy="1074655"/>
           </a:xfrm>
           <a:prstGeom prst="rect">
@@ -4255,7 +4496,7 @@
               </a:lnSpc>
             </a:pPr>
             <a:r>
-              <a:rPr lang="en-US" sz="7368">
+              <a:rPr lang="en-US" sz="7368" dirty="0">
                 <a:solidFill>
                   <a:srgbClr val="000000"/>
                 </a:solidFill>
@@ -4265,6 +4506,71 @@
                 <a:sym typeface="KG Primary Penmanship"/>
               </a:rPr>
               <a:t>Discussion time!</a:t>
+            </a:r>
+          </a:p>
+        </p:txBody>
+      </p:sp>
+      <p:pic>
+        <p:nvPicPr>
+          <p:cNvPr id="15" name="Grafik 14">
+            <a:extLst>
+              <a:ext uri="{FF2B5EF4-FFF2-40B4-BE49-F238E27FC236}">
+                <a16:creationId xmlns:a16="http://schemas.microsoft.com/office/drawing/2014/main" id="{70694901-97D3-73F7-3D3B-E6DBFD91B8A2}"/>
+              </a:ext>
+            </a:extLst>
+          </p:cNvPr>
+          <p:cNvPicPr>
+            <a:picLocks noChangeAspect="1"/>
+          </p:cNvPicPr>
+          <p:nvPr/>
+        </p:nvPicPr>
+        <p:blipFill>
+          <a:blip r:embed="rId2"/>
+          <a:stretch>
+            <a:fillRect/>
+          </a:stretch>
+        </p:blipFill>
+        <p:spPr>
+          <a:xfrm>
+            <a:off x="10210800" y="1514474"/>
+            <a:ext cx="7345147" cy="7258050"/>
+          </a:xfrm>
+          <a:prstGeom prst="rect">
+            <a:avLst/>
+          </a:prstGeom>
+        </p:spPr>
+      </p:pic>
+      <p:sp>
+        <p:nvSpPr>
+          <p:cNvPr id="16" name="Textfeld 15">
+            <a:extLst>
+              <a:ext uri="{FF2B5EF4-FFF2-40B4-BE49-F238E27FC236}">
+                <a16:creationId xmlns:a16="http://schemas.microsoft.com/office/drawing/2014/main" id="{0396B072-1AA0-6997-A261-3D2BBCA71521}"/>
+              </a:ext>
+            </a:extLst>
+          </p:cNvPr>
+          <p:cNvSpPr txBox="1"/>
+          <p:nvPr/>
+        </p:nvSpPr>
+        <p:spPr>
+          <a:xfrm>
+            <a:off x="10210800" y="8783585"/>
+            <a:ext cx="2743200" cy="369332"/>
+          </a:xfrm>
+          <a:prstGeom prst="rect">
+            <a:avLst/>
+          </a:prstGeom>
+          <a:noFill/>
+        </p:spPr>
+        <p:txBody>
+          <a:bodyPr wrap="square" rtlCol="0">
+            <a:spAutoFit/>
+          </a:bodyPr>
+          <a:lstStyle/>
+          <a:p>
+            <a:r>
+              <a:rPr lang="de-AT" dirty="0"/>
+              <a:t>Source: imgflip.com</a:t>
             </a:r>
           </a:p>
         </p:txBody>
@@ -4282,7 +4588,13 @@
   <p:cSld>
     <p:spTree>
       <p:nvGrpSpPr>
-        <p:cNvPr id="1" name=""/>
+        <p:cNvPr id="1" name="">
+          <a:extLst>
+            <a:ext uri="{FF2B5EF4-FFF2-40B4-BE49-F238E27FC236}">
+              <a16:creationId xmlns:a16="http://schemas.microsoft.com/office/drawing/2014/main" id="{394B39EE-9387-7C49-BA99-4F635271079C}"/>
+            </a:ext>
+          </a:extLst>
+        </p:cNvPr>
         <p:cNvGrpSpPr/>
         <p:nvPr/>
       </p:nvGrpSpPr>
@@ -4294,16 +4606,61 @@
           <a:chExt cx="0" cy="0"/>
         </a:xfrm>
       </p:grpSpPr>
-      <p:sp>
-        <p:nvSpPr>
-          <p:cNvPr id="2" name="Freeform 2"/>
+      <p:pic>
+        <p:nvPicPr>
+          <p:cNvPr id="5" name="Grafik 4">
+            <a:extLst>
+              <a:ext uri="{FF2B5EF4-FFF2-40B4-BE49-F238E27FC236}">
+                <a16:creationId xmlns:a16="http://schemas.microsoft.com/office/drawing/2014/main" id="{77A5E288-C61E-B3FC-2136-360FDFA4C6A3}"/>
+              </a:ext>
+            </a:extLst>
+          </p:cNvPr>
+          <p:cNvPicPr>
+            <a:picLocks noChangeAspect="1"/>
+          </p:cNvPicPr>
+          <p:nvPr/>
+        </p:nvPicPr>
+        <p:blipFill>
+          <a:blip r:embed="rId2">
+            <a:extLst>
+              <a:ext uri="{28A0092B-C50C-407E-A947-70E740481C1C}">
+                <a14:useLocalDpi xmlns:a14="http://schemas.microsoft.com/office/drawing/2010/main" val="0"/>
+              </a:ext>
+            </a:extLst>
+          </a:blip>
+          <a:stretch>
+            <a:fillRect/>
+          </a:stretch>
+        </p:blipFill>
+        <p:spPr>
+          <a:xfrm>
+            <a:off x="8278700" y="0"/>
+            <a:ext cx="10009300" cy="10287000"/>
+          </a:xfrm>
+          <a:prstGeom prst="rect">
+            <a:avLst/>
+          </a:prstGeom>
+          <a:ln>
+            <a:noFill/>
+          </a:ln>
+        </p:spPr>
+      </p:pic>
+      <p:sp>
+        <p:nvSpPr>
+          <p:cNvPr id="6" name="Freeform 2">
+            <a:extLst>
+              <a:ext uri="{FF2B5EF4-FFF2-40B4-BE49-F238E27FC236}">
+                <a16:creationId xmlns:a16="http://schemas.microsoft.com/office/drawing/2014/main" id="{C514BB90-57BA-AFE6-AC1F-FEC4247F25E6}"/>
+              </a:ext>
+            </a:extLst>
+          </p:cNvPr>
           <p:cNvSpPr/>
           <p:nvPr/>
         </p:nvSpPr>
         <p:spPr>
           <a:xfrm>
-            <a:off x="645243" y="1476394"/>
-            <a:ext cx="7886250" cy="7334212"/>
+            <a:off x="2438400" y="4366461"/>
+            <a:ext cx="3276600" cy="5517416"/>
           </a:xfrm>
           <a:custGeom>
             <a:avLst/>
@@ -4312,18 +4669,18 @@
             <a:cxnLst/>
             <a:rect l="l" t="t" r="r" b="b"/>
             <a:pathLst>
-              <a:path w="7886250" h="7334212">
+              <a:path w="4948047" h="8229600">
                 <a:moveTo>
                   <a:pt x="0" y="0"/>
                 </a:moveTo>
                 <a:lnTo>
-                  <a:pt x="7886249" y="0"/>
-                </a:lnTo>
-                <a:lnTo>
-                  <a:pt x="7886249" y="7334212"/>
-                </a:lnTo>
-                <a:lnTo>
-                  <a:pt x="0" y="7334212"/>
+                  <a:pt x="4948047" y="0"/>
+                </a:lnTo>
+                <a:lnTo>
+                  <a:pt x="4948047" y="8229600"/>
+                </a:lnTo>
+                <a:lnTo>
+                  <a:pt x="0" y="8229600"/>
                 </a:lnTo>
                 <a:lnTo>
                   <a:pt x="0" y="0"/>
@@ -4336,7 +4693,7 @@
             <a:blip>
               <a:extLst>
                 <a:ext uri="{96DAC541-7B7A-43D3-8B79-37D633B846F1}">
-                  <asvg:svgBlip xmlns:asvg="http://schemas.microsoft.com/office/drawing/2016/SVG/main" r:embed="rId2"/>
+                  <asvg:svgBlip xmlns:asvg="http://schemas.microsoft.com/office/drawing/2016/SVG/main" r:embed="rId3"/>
                 </a:ext>
               </a:extLst>
             </a:blip>
@@ -4355,10 +4712,10 @@
       </p:sp>
       <p:sp>
         <p:nvSpPr>
-          <p:cNvPr id="3" name="Textfeld 2">
+          <p:cNvPr id="7" name="Textfeld 6">
             <a:extLst>
               <a:ext uri="{FF2B5EF4-FFF2-40B4-BE49-F238E27FC236}">
-                <a16:creationId xmlns:a16="http://schemas.microsoft.com/office/drawing/2014/main" id="{8DCB6488-6E08-1E6C-43C7-BBE1D91E7DEC}"/>
+                <a16:creationId xmlns:a16="http://schemas.microsoft.com/office/drawing/2014/main" id="{40FE6B35-91C6-D113-ACDE-04E07AA4783A}"/>
               </a:ext>
             </a:extLst>
           </p:cNvPr>
@@ -4367,8 +4724,8 @@
         </p:nvSpPr>
         <p:spPr>
           <a:xfrm>
-            <a:off x="10591800" y="723900"/>
-            <a:ext cx="7050957" cy="1200329"/>
+            <a:off x="990600" y="419100"/>
+            <a:ext cx="6789260" cy="1015663"/>
           </a:xfrm>
           <a:prstGeom prst="rect">
             <a:avLst/>
@@ -4381,84 +4738,296 @@
           </a:bodyPr>
           <a:lstStyle/>
           <a:p>
-            <a:r>
-              <a:rPr lang="de-AT" dirty="0"/>
-              <a:t>Review </a:t>
-            </a:r>
-            <a:r>
-              <a:rPr lang="de-AT" dirty="0" err="1"/>
+            <a:pPr algn="ctr"/>
+            <a:r>
+              <a:rPr lang="de-AT" sz="6000">
+                <a:latin typeface="Fredoka" panose="020B0604020202020204" charset="0"/>
+              </a:rPr>
+              <a:t>Quality Analysis</a:t>
+            </a:r>
+            <a:endParaRPr lang="de-AT" sz="6000" dirty="0">
+              <a:latin typeface="Fredoka" panose="020B0604020202020204" charset="0"/>
+            </a:endParaRPr>
+          </a:p>
+        </p:txBody>
+      </p:sp>
+      <p:sp>
+        <p:nvSpPr>
+          <p:cNvPr id="8" name="Textfeld 7">
+            <a:extLst>
+              <a:ext uri="{FF2B5EF4-FFF2-40B4-BE49-F238E27FC236}">
+                <a16:creationId xmlns:a16="http://schemas.microsoft.com/office/drawing/2014/main" id="{83C2C069-AA71-5C06-E494-E4B061CC408E}"/>
+              </a:ext>
+            </a:extLst>
+          </p:cNvPr>
+          <p:cNvSpPr txBox="1"/>
+          <p:nvPr/>
+        </p:nvSpPr>
+        <p:spPr>
+          <a:xfrm>
+            <a:off x="966019" y="1866900"/>
+            <a:ext cx="6789260" cy="2246769"/>
+          </a:xfrm>
+          <a:prstGeom prst="rect">
+            <a:avLst/>
+          </a:prstGeom>
+          <a:noFill/>
+        </p:spPr>
+        <p:txBody>
+          <a:bodyPr wrap="square" rtlCol="0">
+            <a:spAutoFit/>
+          </a:bodyPr>
+          <a:lstStyle/>
+          <a:p>
+            <a:pPr algn="ctr"/>
+            <a:r>
+              <a:rPr lang="de-AT" sz="2000" dirty="0">
+                <a:latin typeface="Fredoka" panose="020B0604020202020204" charset="0"/>
+              </a:rPr>
+              <a:t>Standard Quality Assessment </a:t>
+            </a:r>
+            <a:r>
+              <a:rPr lang="de-AT" sz="2000" dirty="0" err="1">
+                <a:latin typeface="Fredoka" panose="020B0604020202020204" charset="0"/>
+              </a:rPr>
+              <a:t>Criteria</a:t>
+            </a:r>
+            <a:r>
+              <a:rPr lang="de-AT" sz="2000" dirty="0">
+                <a:latin typeface="Fredoka" panose="020B0604020202020204" charset="0"/>
+              </a:rPr>
+              <a:t> (SQAC)</a:t>
+            </a:r>
+            <a:br>
+              <a:rPr lang="de-AT" sz="2000" dirty="0">
+                <a:latin typeface="Fredoka" panose="020B0604020202020204" charset="0"/>
+              </a:rPr>
+            </a:br>
+            <a:endParaRPr lang="de-AT" sz="2000" dirty="0">
+              <a:latin typeface="Fredoka" panose="020B0604020202020204" charset="0"/>
+            </a:endParaRPr>
+          </a:p>
+          <a:p>
+            <a:pPr marL="457200" indent="-457200">
+              <a:buAutoNum type="arabicPeriod"/>
+            </a:pPr>
+            <a:r>
+              <a:rPr lang="de-AT" sz="2000" dirty="0">
+                <a:latin typeface="Fredoka" panose="020B0604020202020204" charset="0"/>
+              </a:rPr>
+              <a:t>Search </a:t>
+            </a:r>
+            <a:r>
+              <a:rPr lang="de-AT" sz="2000" dirty="0" err="1">
+                <a:latin typeface="Fredoka" panose="020B0604020202020204" charset="0"/>
+              </a:rPr>
+              <a:t>keywords</a:t>
+            </a:r>
+            <a:r>
+              <a:rPr lang="de-AT" sz="2000" dirty="0">
+                <a:latin typeface="Fredoka" panose="020B0604020202020204" charset="0"/>
+              </a:rPr>
+              <a:t> (e.g. ChatGPT,…)</a:t>
+            </a:r>
+          </a:p>
+          <a:p>
+            <a:pPr marL="457200" indent="-457200">
+              <a:buAutoNum type="arabicPeriod"/>
+            </a:pPr>
+            <a:r>
+              <a:rPr lang="de-AT" sz="2000" dirty="0" err="1">
+                <a:latin typeface="Fredoka" panose="020B0604020202020204" charset="0"/>
+              </a:rPr>
+              <a:t>Inclusion</a:t>
+            </a:r>
+            <a:r>
+              <a:rPr lang="de-AT" sz="2000" dirty="0">
+                <a:latin typeface="Fredoka" panose="020B0604020202020204" charset="0"/>
+              </a:rPr>
+              <a:t> </a:t>
+            </a:r>
+            <a:r>
+              <a:rPr lang="de-AT" sz="2000" dirty="0" err="1">
+                <a:latin typeface="Fredoka" panose="020B0604020202020204" charset="0"/>
+              </a:rPr>
+              <a:t>criteria</a:t>
+            </a:r>
+            <a:r>
+              <a:rPr lang="de-AT" sz="2000" dirty="0">
+                <a:latin typeface="Fredoka" panose="020B0604020202020204" charset="0"/>
+              </a:rPr>
+              <a:t> (e.g. </a:t>
+            </a:r>
+            <a:r>
+              <a:rPr lang="de-AT" sz="2000" dirty="0" err="1">
+                <a:latin typeface="Fredoka" panose="020B0604020202020204" charset="0"/>
+              </a:rPr>
+              <a:t>used</a:t>
+            </a:r>
+            <a:r>
+              <a:rPr lang="de-AT" sz="2000" dirty="0">
+                <a:latin typeface="Fredoka" panose="020B0604020202020204" charset="0"/>
+              </a:rPr>
+              <a:t> ChatGPT, </a:t>
+            </a:r>
+            <a:r>
+              <a:rPr lang="de-AT" sz="2000" dirty="0" err="1">
+                <a:latin typeface="Fredoka" panose="020B0604020202020204" charset="0"/>
+              </a:rPr>
+              <a:t>used</a:t>
+            </a:r>
+            <a:r>
+              <a:rPr lang="de-AT" sz="2000" dirty="0">
+                <a:latin typeface="Fredoka" panose="020B0604020202020204" charset="0"/>
+              </a:rPr>
+              <a:t> experimental and quasi-experimental </a:t>
+            </a:r>
+            <a:r>
+              <a:rPr lang="de-AT" sz="2000" dirty="0" err="1">
+                <a:latin typeface="Fredoka" panose="020B0604020202020204" charset="0"/>
+              </a:rPr>
+              <a:t>designs</a:t>
+            </a:r>
+            <a:r>
+              <a:rPr lang="de-AT" sz="2000" dirty="0">
+                <a:latin typeface="Fredoka" panose="020B0604020202020204" charset="0"/>
+              </a:rPr>
+              <a:t>,…)</a:t>
+            </a:r>
+          </a:p>
+          <a:p>
+            <a:pPr marL="457200" indent="-457200">
+              <a:buAutoNum type="arabicPeriod"/>
+            </a:pPr>
+            <a:r>
+              <a:rPr lang="de-AT" sz="2000" dirty="0" err="1">
+                <a:latin typeface="Fredoka" panose="020B0604020202020204" charset="0"/>
+              </a:rPr>
+              <a:t>Exclusion</a:t>
+            </a:r>
+            <a:r>
+              <a:rPr lang="de-AT" sz="2000" dirty="0">
+                <a:latin typeface="Fredoka" panose="020B0604020202020204" charset="0"/>
+              </a:rPr>
+              <a:t> </a:t>
+            </a:r>
+            <a:r>
+              <a:rPr lang="de-AT" sz="2000" dirty="0" err="1">
+                <a:latin typeface="Fredoka" panose="020B0604020202020204" charset="0"/>
+              </a:rPr>
+              <a:t>criteria</a:t>
+            </a:r>
+            <a:r>
+              <a:rPr lang="de-AT" sz="2000" dirty="0">
+                <a:latin typeface="Fredoka" panose="020B0604020202020204" charset="0"/>
+              </a:rPr>
+              <a:t> (e.g. </a:t>
+            </a:r>
+            <a:r>
+              <a:rPr lang="de-AT" sz="2000" dirty="0" err="1">
+                <a:latin typeface="Fredoka" panose="020B0604020202020204" charset="0"/>
+              </a:rPr>
+              <a:t>no</a:t>
+            </a:r>
+            <a:r>
+              <a:rPr lang="de-AT" sz="2000" dirty="0">
+                <a:latin typeface="Fredoka" panose="020B0604020202020204" charset="0"/>
+              </a:rPr>
+              <a:t> </a:t>
+            </a:r>
+            <a:r>
+              <a:rPr lang="de-AT" sz="2000" dirty="0" err="1">
+                <a:latin typeface="Fredoka" panose="020B0604020202020204" charset="0"/>
+              </a:rPr>
+              <a:t>focus</a:t>
+            </a:r>
+            <a:r>
+              <a:rPr lang="de-AT" sz="2000" dirty="0">
+                <a:latin typeface="Fredoka" panose="020B0604020202020204" charset="0"/>
+              </a:rPr>
+              <a:t> on </a:t>
+            </a:r>
+            <a:r>
+              <a:rPr lang="de-AT" sz="2000" dirty="0" err="1">
+                <a:latin typeface="Fredoka" panose="020B0604020202020204" charset="0"/>
+              </a:rPr>
+              <a:t>rich</a:t>
+            </a:r>
+            <a:r>
+              <a:rPr lang="de-AT" sz="2000" dirty="0">
+                <a:latin typeface="Fredoka" panose="020B0604020202020204" charset="0"/>
+              </a:rPr>
+              <a:t> qualitative </a:t>
+            </a:r>
+            <a:r>
+              <a:rPr lang="de-AT" sz="2000" dirty="0" err="1">
+                <a:latin typeface="Fredoka" panose="020B0604020202020204" charset="0"/>
+              </a:rPr>
+              <a:t>data</a:t>
+            </a:r>
+            <a:r>
+              <a:rPr lang="de-AT" sz="2000" dirty="0">
+                <a:latin typeface="Fredoka" panose="020B0604020202020204" charset="0"/>
+              </a:rPr>
+              <a:t>, </a:t>
+            </a:r>
+            <a:r>
+              <a:rPr lang="de-AT" sz="2000" dirty="0" err="1">
+                <a:latin typeface="Fredoka" panose="020B0604020202020204" charset="0"/>
+              </a:rPr>
+              <a:t>focus</a:t>
+            </a:r>
+            <a:r>
+              <a:rPr lang="de-AT" sz="2000" dirty="0">
+                <a:latin typeface="Fredoka" panose="020B0604020202020204" charset="0"/>
+              </a:rPr>
+              <a:t> on </a:t>
+            </a:r>
+            <a:r>
+              <a:rPr lang="de-AT" sz="2000" dirty="0" err="1">
+                <a:latin typeface="Fredoka" panose="020B0604020202020204" charset="0"/>
+              </a:rPr>
+              <a:t>broader</a:t>
+            </a:r>
+            <a:r>
+              <a:rPr lang="de-AT" sz="2000" dirty="0">
+                <a:latin typeface="Fredoka" panose="020B0604020202020204" charset="0"/>
+              </a:rPr>
+              <a:t> </a:t>
+            </a:r>
+            <a:r>
+              <a:rPr lang="de-AT" sz="2000" dirty="0" err="1">
+                <a:latin typeface="Fredoka" panose="020B0604020202020204" charset="0"/>
+              </a:rPr>
+              <a:t>impact</a:t>
+            </a:r>
+            <a:r>
+              <a:rPr lang="de-AT" sz="2000" dirty="0">
+                <a:latin typeface="Fredoka" panose="020B0604020202020204" charset="0"/>
+              </a:rPr>
+              <a:t> </a:t>
+            </a:r>
+            <a:r>
+              <a:rPr lang="de-AT" sz="2000" dirty="0" err="1">
+                <a:latin typeface="Fredoka" panose="020B0604020202020204" charset="0"/>
+              </a:rPr>
               <a:t>of</a:t>
             </a:r>
             <a:r>
-              <a:rPr lang="de-AT" dirty="0"/>
-              <a:t> </a:t>
-            </a:r>
-            <a:r>
-              <a:rPr lang="de-AT" dirty="0" err="1"/>
-              <a:t>the</a:t>
-            </a:r>
-            <a:r>
-              <a:rPr lang="de-AT" dirty="0"/>
-              <a:t> Study: Marina</a:t>
-            </a:r>
-          </a:p>
-          <a:p>
-            <a:r>
-              <a:rPr lang="de-AT" dirty="0"/>
-              <a:t>Main </a:t>
-            </a:r>
-            <a:r>
-              <a:rPr lang="de-AT" dirty="0" err="1"/>
-              <a:t>Results</a:t>
-            </a:r>
-            <a:r>
-              <a:rPr lang="de-AT" dirty="0"/>
-              <a:t>: Marina</a:t>
-            </a:r>
-          </a:p>
-          <a:p>
-            <a:r>
-              <a:rPr lang="de-AT" dirty="0"/>
-              <a:t>Quality and Prisma </a:t>
-            </a:r>
-            <a:r>
-              <a:rPr lang="de-AT" dirty="0" err="1"/>
-              <a:t>What</a:t>
-            </a:r>
-            <a:r>
-              <a:rPr lang="de-AT" dirty="0"/>
-              <a:t> </a:t>
-            </a:r>
-            <a:r>
-              <a:rPr lang="de-AT" dirty="0" err="1"/>
-              <a:t>is</a:t>
-            </a:r>
-            <a:r>
-              <a:rPr lang="de-AT" dirty="0"/>
-              <a:t> </a:t>
-            </a:r>
-            <a:r>
-              <a:rPr lang="de-AT" dirty="0" err="1"/>
-              <a:t>concluded</a:t>
-            </a:r>
-            <a:r>
-              <a:rPr lang="de-AT" dirty="0"/>
-              <a:t>: Christina</a:t>
-            </a:r>
-          </a:p>
-          <a:p>
-            <a:r>
-              <a:rPr lang="de-AT" dirty="0" err="1"/>
-              <a:t>Conclusion</a:t>
-            </a:r>
-            <a:r>
-              <a:rPr lang="de-AT" dirty="0"/>
-              <a:t> and Stakeholders: Maria Clara</a:t>
+              <a:rPr lang="de-AT" sz="2000" dirty="0">
+                <a:latin typeface="Fredoka" panose="020B0604020202020204" charset="0"/>
+              </a:rPr>
+              <a:t> non-gen AI,…)</a:t>
             </a:r>
           </a:p>
         </p:txBody>
       </p:sp>
     </p:spTree>
+    <p:extLst>
+      <p:ext uri="{BB962C8B-B14F-4D97-AF65-F5344CB8AC3E}">
+        <p14:creationId xmlns:p14="http://schemas.microsoft.com/office/powerpoint/2010/main" val="3676627759"/>
+      </p:ext>
+    </p:extLst>
   </p:cSld>
   <p:clrMapOvr>
     <a:masterClrMapping/>
@@ -4491,8 +5060,8 @@
         </p:nvSpPr>
         <p:spPr>
           <a:xfrm>
-            <a:off x="10007675" y="2809275"/>
-            <a:ext cx="7846135" cy="4668450"/>
+            <a:off x="645243" y="1476394"/>
+            <a:ext cx="7886250" cy="7334212"/>
           </a:xfrm>
           <a:custGeom>
             <a:avLst/>
@@ -4501,18 +5070,18 @@
             <a:cxnLst/>
             <a:rect l="l" t="t" r="r" b="b"/>
             <a:pathLst>
-              <a:path w="7846135" h="4668450">
+              <a:path w="7886250" h="7334212">
                 <a:moveTo>
                   <a:pt x="0" y="0"/>
                 </a:moveTo>
                 <a:lnTo>
-                  <a:pt x="7846135" y="0"/>
-                </a:lnTo>
-                <a:lnTo>
-                  <a:pt x="7846135" y="4668450"/>
-                </a:lnTo>
-                <a:lnTo>
-                  <a:pt x="0" y="4668450"/>
+                  <a:pt x="7886249" y="0"/>
+                </a:lnTo>
+                <a:lnTo>
+                  <a:pt x="7886249" y="7334212"/>
+                </a:lnTo>
+                <a:lnTo>
+                  <a:pt x="0" y="7334212"/>
                 </a:lnTo>
                 <a:lnTo>
                   <a:pt x="0" y="0"/>
@@ -4539,6 +5108,111 @@
           <a:lstStyle/>
           <a:p>
             <a:endParaRPr lang="de-AT"/>
+          </a:p>
+        </p:txBody>
+      </p:sp>
+      <p:sp>
+        <p:nvSpPr>
+          <p:cNvPr id="3" name="Textfeld 2">
+            <a:extLst>
+              <a:ext uri="{FF2B5EF4-FFF2-40B4-BE49-F238E27FC236}">
+                <a16:creationId xmlns:a16="http://schemas.microsoft.com/office/drawing/2014/main" id="{8DCB6488-6E08-1E6C-43C7-BBE1D91E7DEC}"/>
+              </a:ext>
+            </a:extLst>
+          </p:cNvPr>
+          <p:cNvSpPr txBox="1"/>
+          <p:nvPr/>
+        </p:nvSpPr>
+        <p:spPr>
+          <a:xfrm>
+            <a:off x="10591800" y="723900"/>
+            <a:ext cx="7050957" cy="1200329"/>
+          </a:xfrm>
+          <a:prstGeom prst="rect">
+            <a:avLst/>
+          </a:prstGeom>
+          <a:noFill/>
+        </p:spPr>
+        <p:txBody>
+          <a:bodyPr wrap="square" rtlCol="0">
+            <a:spAutoFit/>
+          </a:bodyPr>
+          <a:lstStyle/>
+          <a:p>
+            <a:r>
+              <a:rPr lang="de-AT" dirty="0"/>
+              <a:t>Review </a:t>
+            </a:r>
+            <a:r>
+              <a:rPr lang="de-AT" dirty="0" err="1"/>
+              <a:t>of</a:t>
+            </a:r>
+            <a:r>
+              <a:rPr lang="de-AT" dirty="0"/>
+              <a:t> </a:t>
+            </a:r>
+            <a:r>
+              <a:rPr lang="de-AT" dirty="0" err="1"/>
+              <a:t>the</a:t>
+            </a:r>
+            <a:r>
+              <a:rPr lang="de-AT" dirty="0"/>
+              <a:t> Study: Marina</a:t>
+            </a:r>
+          </a:p>
+          <a:p>
+            <a:r>
+              <a:rPr lang="de-AT" dirty="0"/>
+              <a:t>Main </a:t>
+            </a:r>
+            <a:r>
+              <a:rPr lang="de-AT" dirty="0" err="1"/>
+              <a:t>Results</a:t>
+            </a:r>
+            <a:r>
+              <a:rPr lang="de-AT" dirty="0"/>
+              <a:t>: Marina</a:t>
+            </a:r>
+          </a:p>
+          <a:p>
+            <a:r>
+              <a:rPr lang="de-AT" dirty="0"/>
+              <a:t>Quality and Prisma </a:t>
+            </a:r>
+            <a:r>
+              <a:rPr lang="de-AT" dirty="0" err="1"/>
+              <a:t>What</a:t>
+            </a:r>
+            <a:r>
+              <a:rPr lang="de-AT" dirty="0"/>
+              <a:t> </a:t>
+            </a:r>
+            <a:r>
+              <a:rPr lang="de-AT" dirty="0" err="1"/>
+              <a:t>is</a:t>
+            </a:r>
+            <a:r>
+              <a:rPr lang="de-AT" dirty="0"/>
+              <a:t> </a:t>
+            </a:r>
+            <a:r>
+              <a:rPr lang="de-AT" dirty="0" err="1"/>
+              <a:t>concluded</a:t>
+            </a:r>
+            <a:r>
+              <a:rPr lang="de-AT" dirty="0"/>
+              <a:t>: Christina</a:t>
+            </a:r>
+          </a:p>
+          <a:p>
+            <a:r>
+              <a:rPr lang="de-AT" dirty="0" err="1"/>
+              <a:t>Conclusion</a:t>
+            </a:r>
+            <a:r>
+              <a:rPr lang="de-AT" dirty="0"/>
+              <a:t> and Stakeholders: Maria Clara</a:t>
+            </a:r>
           </a:p>
         </p:txBody>
       </p:sp>
@@ -4575,8 +5249,8 @@
         </p:nvSpPr>
         <p:spPr>
           <a:xfrm>
-            <a:off x="922545" y="4487972"/>
-            <a:ext cx="7709622" cy="4770328"/>
+            <a:off x="10007675" y="2809275"/>
+            <a:ext cx="7846135" cy="4668450"/>
           </a:xfrm>
           <a:custGeom>
             <a:avLst/>
@@ -4585,18 +5259,18 @@
             <a:cxnLst/>
             <a:rect l="l" t="t" r="r" b="b"/>
             <a:pathLst>
-              <a:path w="7709622" h="4770328">
+              <a:path w="7846135" h="4668450">
                 <a:moveTo>
                   <a:pt x="0" y="0"/>
                 </a:moveTo>
                 <a:lnTo>
-                  <a:pt x="7709621" y="0"/>
-                </a:lnTo>
-                <a:lnTo>
-                  <a:pt x="7709621" y="4770328"/>
-                </a:lnTo>
-                <a:lnTo>
-                  <a:pt x="0" y="4770328"/>
+                  <a:pt x="7846135" y="0"/>
+                </a:lnTo>
+                <a:lnTo>
+                  <a:pt x="7846135" y="4668450"/>
+                </a:lnTo>
+                <a:lnTo>
+                  <a:pt x="0" y="4668450"/>
                 </a:lnTo>
                 <a:lnTo>
                   <a:pt x="0" y="0"/>
@@ -4610,6 +5284,71 @@
               <a:extLst>
                 <a:ext uri="{96DAC541-7B7A-43D3-8B79-37D633B846F1}">
                   <asvg:svgBlip xmlns:asvg="http://schemas.microsoft.com/office/drawing/2016/SVG/main" r:embed="rId2"/>
+                </a:ext>
+              </a:extLst>
+            </a:blip>
+            <a:stretch>
+              <a:fillRect/>
+            </a:stretch>
+          </a:blipFill>
+        </p:spPr>
+        <p:txBody>
+          <a:bodyPr/>
+          <a:lstStyle/>
+          <a:p>
+            <a:endParaRPr lang="de-AT"/>
+          </a:p>
+        </p:txBody>
+      </p:sp>
+      <p:sp>
+        <p:nvSpPr>
+          <p:cNvPr id="3" name="Freeform 2">
+            <a:extLst>
+              <a:ext uri="{FF2B5EF4-FFF2-40B4-BE49-F238E27FC236}">
+                <a16:creationId xmlns:a16="http://schemas.microsoft.com/office/drawing/2014/main" id="{73FDB8E4-7690-34A1-B34D-84F95D11197D}"/>
+              </a:ext>
+            </a:extLst>
+          </p:cNvPr>
+          <p:cNvSpPr/>
+          <p:nvPr/>
+        </p:nvSpPr>
+        <p:spPr>
+          <a:xfrm>
+            <a:off x="2264376" y="1020977"/>
+            <a:ext cx="4948047" cy="8229600"/>
+          </a:xfrm>
+          <a:custGeom>
+            <a:avLst/>
+            <a:gdLst/>
+            <a:ahLst/>
+            <a:cxnLst/>
+            <a:rect l="l" t="t" r="r" b="b"/>
+            <a:pathLst>
+              <a:path w="4948047" h="8229600">
+                <a:moveTo>
+                  <a:pt x="0" y="0"/>
+                </a:moveTo>
+                <a:lnTo>
+                  <a:pt x="4948047" y="0"/>
+                </a:lnTo>
+                <a:lnTo>
+                  <a:pt x="4948047" y="8229600"/>
+                </a:lnTo>
+                <a:lnTo>
+                  <a:pt x="0" y="8229600"/>
+                </a:lnTo>
+                <a:lnTo>
+                  <a:pt x="0" y="0"/>
+                </a:lnTo>
+                <a:close/>
+              </a:path>
+            </a:pathLst>
+          </a:custGeom>
+          <a:blipFill>
+            <a:blip>
+              <a:extLst>
+                <a:ext uri="{96DAC541-7B7A-43D3-8B79-37D633B846F1}">
+                  <asvg:svgBlip xmlns:asvg="http://schemas.microsoft.com/office/drawing/2016/SVG/main" r:embed="rId3"/>
                 </a:ext>
               </a:extLst>
             </a:blip>
@@ -4659,8 +5398,8 @@
         </p:nvSpPr>
         <p:spPr>
           <a:xfrm>
-            <a:off x="10022686" y="2707598"/>
-            <a:ext cx="7538575" cy="4871804"/>
+            <a:off x="922545" y="4487972"/>
+            <a:ext cx="7709622" cy="4770328"/>
           </a:xfrm>
           <a:custGeom>
             <a:avLst/>
@@ -4669,18 +5408,18 @@
             <a:cxnLst/>
             <a:rect l="l" t="t" r="r" b="b"/>
             <a:pathLst>
-              <a:path w="7538575" h="4871804">
+              <a:path w="7709622" h="4770328">
                 <a:moveTo>
                   <a:pt x="0" y="0"/>
                 </a:moveTo>
                 <a:lnTo>
-                  <a:pt x="7538575" y="0"/>
-                </a:lnTo>
-                <a:lnTo>
-                  <a:pt x="7538575" y="4871804"/>
-                </a:lnTo>
-                <a:lnTo>
-                  <a:pt x="0" y="4871804"/>
+                  <a:pt x="7709621" y="0"/>
+                </a:lnTo>
+                <a:lnTo>
+                  <a:pt x="7709621" y="4770328"/>
+                </a:lnTo>
+                <a:lnTo>
+                  <a:pt x="0" y="4770328"/>
                 </a:lnTo>
                 <a:lnTo>
                   <a:pt x="0" y="0"/>
@@ -4743,8 +5482,8 @@
         </p:nvSpPr>
         <p:spPr>
           <a:xfrm>
-            <a:off x="400723" y="1729250"/>
-            <a:ext cx="6652240" cy="8051123"/>
+            <a:off x="10022686" y="2707598"/>
+            <a:ext cx="7538575" cy="4871804"/>
           </a:xfrm>
           <a:custGeom>
             <a:avLst/>
@@ -4753,18 +5492,18 @@
             <a:cxnLst/>
             <a:rect l="l" t="t" r="r" b="b"/>
             <a:pathLst>
-              <a:path w="6652240" h="8051123">
+              <a:path w="7538575" h="4871804">
                 <a:moveTo>
                   <a:pt x="0" y="0"/>
                 </a:moveTo>
                 <a:lnTo>
-                  <a:pt x="6652240" y="0"/>
-                </a:lnTo>
-                <a:lnTo>
-                  <a:pt x="6652240" y="8051123"/>
-                </a:lnTo>
-                <a:lnTo>
-                  <a:pt x="0" y="8051123"/>
+                  <a:pt x="7538575" y="0"/>
+                </a:lnTo>
+                <a:lnTo>
+                  <a:pt x="7538575" y="4871804"/>
+                </a:lnTo>
+                <a:lnTo>
+                  <a:pt x="0" y="4871804"/>
                 </a:lnTo>
                 <a:lnTo>
                   <a:pt x="0" y="0"/>
@@ -4827,8 +5566,8 @@
         </p:nvSpPr>
         <p:spPr>
           <a:xfrm>
-            <a:off x="10169297" y="1924944"/>
-            <a:ext cx="7561952" cy="6437112"/>
+            <a:off x="400723" y="1729250"/>
+            <a:ext cx="6652240" cy="8051123"/>
           </a:xfrm>
           <a:custGeom>
             <a:avLst/>
@@ -4837,18 +5576,18 @@
             <a:cxnLst/>
             <a:rect l="l" t="t" r="r" b="b"/>
             <a:pathLst>
-              <a:path w="7561952" h="6437112">
+              <a:path w="6652240" h="8051123">
                 <a:moveTo>
                   <a:pt x="0" y="0"/>
                 </a:moveTo>
                 <a:lnTo>
-                  <a:pt x="7561953" y="0"/>
-                </a:lnTo>
-                <a:lnTo>
-                  <a:pt x="7561953" y="6437112"/>
-                </a:lnTo>
-                <a:lnTo>
-                  <a:pt x="0" y="6437112"/>
+                  <a:pt x="6652240" y="0"/>
+                </a:lnTo>
+                <a:lnTo>
+                  <a:pt x="6652240" y="8051123"/>
+                </a:lnTo>
+                <a:lnTo>
+                  <a:pt x="0" y="8051123"/>
                 </a:lnTo>
                 <a:lnTo>
                   <a:pt x="0" y="0"/>
@@ -4911,8 +5650,8 @@
         </p:nvSpPr>
         <p:spPr>
           <a:xfrm>
-            <a:off x="437610" y="2642007"/>
-            <a:ext cx="6871547" cy="7290766"/>
+            <a:off x="10169297" y="1924944"/>
+            <a:ext cx="7561952" cy="6437112"/>
           </a:xfrm>
           <a:custGeom>
             <a:avLst/>
@@ -4921,18 +5660,18 @@
             <a:cxnLst/>
             <a:rect l="l" t="t" r="r" b="b"/>
             <a:pathLst>
-              <a:path w="6871547" h="7290766">
+              <a:path w="7561952" h="6437112">
                 <a:moveTo>
                   <a:pt x="0" y="0"/>
                 </a:moveTo>
                 <a:lnTo>
-                  <a:pt x="6871547" y="0"/>
-                </a:lnTo>
-                <a:lnTo>
-                  <a:pt x="6871547" y="7290766"/>
-                </a:lnTo>
-                <a:lnTo>
-                  <a:pt x="0" y="7290766"/>
+                  <a:pt x="7561953" y="0"/>
+                </a:lnTo>
+                <a:lnTo>
+                  <a:pt x="7561953" y="6437112"/>
+                </a:lnTo>
+                <a:lnTo>
+                  <a:pt x="0" y="6437112"/>
                 </a:lnTo>
                 <a:lnTo>
                   <a:pt x="0" y="0"/>
@@ -4995,8 +5734,8 @@
         </p:nvSpPr>
         <p:spPr>
           <a:xfrm>
-            <a:off x="10045217" y="2099566"/>
-            <a:ext cx="7574331" cy="6087869"/>
+            <a:off x="437610" y="2642007"/>
+            <a:ext cx="6871547" cy="7290766"/>
           </a:xfrm>
           <a:custGeom>
             <a:avLst/>
@@ -5005,18 +5744,18 @@
             <a:cxnLst/>
             <a:rect l="l" t="t" r="r" b="b"/>
             <a:pathLst>
-              <a:path w="7574331" h="6087869">
+              <a:path w="6871547" h="7290766">
                 <a:moveTo>
                   <a:pt x="0" y="0"/>
                 </a:moveTo>
                 <a:lnTo>
-                  <a:pt x="7574331" y="0"/>
-                </a:lnTo>
-                <a:lnTo>
-                  <a:pt x="7574331" y="6087868"/>
-                </a:lnTo>
-                <a:lnTo>
-                  <a:pt x="0" y="6087868"/>
+                  <a:pt x="6871547" y="0"/>
+                </a:lnTo>
+                <a:lnTo>
+                  <a:pt x="6871547" y="7290766"/>
+                </a:lnTo>
+                <a:lnTo>
+                  <a:pt x="0" y="7290766"/>
                 </a:lnTo>
                 <a:lnTo>
                   <a:pt x="0" y="0"/>
